--- a/dist/초6/수학/입체와측정/초6_수학_입체와측정_04_직육면체의겉넓이_학생용.pptx
+++ b/dist/초6/수학/입체와측정/초6_수학_입체와측정_04_직육면체의겉넓이_학생용.pptx
@@ -119,13 +119,13 @@
   <p:extLst>
     <p:ext uri="{521415D9-36F7-43E2-AB2F-B90AF26B5E84}">
       <p14:sectionLst xmlns:p14="http://schemas.microsoft.com/office/powerpoint/2010/main">
-        <p14:section name="도입" id="{6a058e81-06c6-93c3-c6cb-07b71dd69c4c}">
+        <p14:section name="도입" id="{91040a69-6e41-9040-6fd3-163f0878c4e7}">
           <p14:sldIdLst>
             <p14:sldId id="256"/>
             <p14:sldId id="257"/>
           </p14:sldIdLst>
         </p14:section>
-        <p14:section name="개념" id="{52c2a15a-cdd6-72ff-f726-49782a231729}">
+        <p14:section name="개념" id="{db30fa23-d8ce-5844-123e-81e9925de083}">
           <p14:sldIdLst>
             <p14:sldId id="258"/>
             <p14:sldId id="259"/>
@@ -133,31 +133,31 @@
             <p14:sldId id="263"/>
           </p14:sldIdLst>
         </p14:section>
-        <p14:section name="연습" id="{ba380037-0e01-10e5-8f75-4170a24c3b31}">
+        <p14:section name="연습" id="{fcc9a6f2-726a-5359-2d40-5f22020b7256}">
           <p14:sldIdLst>
             <p14:sldId id="261"/>
             <p14:sldId id="262"/>
             <p14:sldId id="264"/>
           </p14:sldIdLst>
         </p14:section>
-        <p14:section name="개념" id="{6fd047b6-b5ca-2de1-195f-b2552d1de02f}">
+        <p14:section name="개념" id="{2275522b-bdbf-2472-aa63-ef1d3f59a6f7}">
           <p14:sldIdLst/>
         </p14:section>
-        <p14:section name="연습" id="{b35038d4-b5df-e866-9c15-a1e923d3a882}">
+        <p14:section name="연습" id="{9fe5533b-2c74-12e5-38b5-7172a0e41491}">
           <p14:sldIdLst/>
         </p14:section>
-        <p14:section name="확인" id="{1bc226f4-30e3-ceae-86b8-aa5ad0fe8b71}">
+        <p14:section name="확인" id="{4dbe110a-132e-2a11-7097-309e4edc1020}">
           <p14:sldIdLst>
             <p14:sldId id="265"/>
             <p14:sldId id="266"/>
           </p14:sldIdLst>
         </p14:section>
-        <p14:section name="정리" id="{bc1b2fe8-4192-0bd9-80a9-d288645dcd68}">
+        <p14:section name="정리" id="{62d0ae22-a67e-3eb7-5fb8-cb080b242470}">
           <p14:sldIdLst>
             <p14:sldId id="267"/>
           </p14:sldIdLst>
         </p14:section>
-        <p14:section name="보충" id="{d2963346-e9ef-2a18-52fe-066c3cee75b2}">
+        <p14:section name="보충" id="{7dddb8e2-bba0-8e65-d4d1-a47038a97134}">
           <p14:sldIdLst>
             <p14:sldId id="268"/>
           </p14:sldIdLst>
@@ -2795,8 +2795,8 @@
         </p:nvSpPr>
         <p:spPr>
           <a:xfrm>
-            <a:off x="8181645" y="1796694"/>
-            <a:ext cx="2228555" cy="1114278"/>
+            <a:off x="8181645" y="1678726"/>
+            <a:ext cx="1786921" cy="893460"/>
           </a:xfrm>
           <a:custGeom>
             <a:avLst/>
@@ -2805,15 +2805,15 @@
             <a:cxnLst/>
             <a:rect l="l" t="t" r="r" b="b"/>
             <a:pathLst>
-              <a:path w="2228555" h="1114278">
+              <a:path w="1786921" h="893460">
                 <a:moveTo>
-                  <a:pt x="0" y="1114278"/>
+                  <a:pt x="0" y="893460"/>
                 </a:moveTo>
                 <a:lnTo>
-                  <a:pt x="2228555" y="1114278"/>
-                </a:lnTo>
-                <a:lnTo>
-                  <a:pt x="2228555" y="0"/>
+                  <a:pt x="1786921" y="893460"/>
+                </a:lnTo>
+                <a:lnTo>
+                  <a:pt x="1786921" y="0"/>
                 </a:lnTo>
                 <a:lnTo>
                   <a:pt x="0" y="0"/>
@@ -2841,8 +2841,8 @@
         </p:nvSpPr>
         <p:spPr>
           <a:xfrm>
-            <a:off x="8181645" y="1295269"/>
-            <a:ext cx="2930550" cy="501425"/>
+            <a:off x="8181645" y="1276669"/>
+            <a:ext cx="2349801" cy="402057"/>
           </a:xfrm>
           <a:custGeom>
             <a:avLst/>
@@ -2851,18 +2851,18 @@
             <a:cxnLst/>
             <a:rect l="l" t="t" r="r" b="b"/>
             <a:pathLst>
-              <a:path w="2930550" h="501425">
+              <a:path w="2349801" h="402057">
                 <a:moveTo>
-                  <a:pt x="0" y="501425"/>
+                  <a:pt x="0" y="402057"/>
                 </a:moveTo>
                 <a:lnTo>
-                  <a:pt x="2228555" y="501425"/>
-                </a:lnTo>
-                <a:lnTo>
-                  <a:pt x="2930550" y="0"/>
-                </a:lnTo>
-                <a:lnTo>
-                  <a:pt x="701995" y="0"/>
+                  <a:pt x="1786921" y="402057"/>
+                </a:lnTo>
+                <a:lnTo>
+                  <a:pt x="2349801" y="0"/>
+                </a:lnTo>
+                <a:lnTo>
+                  <a:pt x="562880" y="0"/>
                 </a:lnTo>
                 <a:close/>
               </a:path>
@@ -2887,8 +2887,8 @@
         </p:nvSpPr>
         <p:spPr>
           <a:xfrm>
-            <a:off x="10410200" y="1295269"/>
-            <a:ext cx="701995" cy="1615703"/>
+            <a:off x="9968566" y="1276669"/>
+            <a:ext cx="562880" cy="1295518"/>
           </a:xfrm>
           <a:custGeom>
             <a:avLst/>
@@ -2897,18 +2897,18 @@
             <a:cxnLst/>
             <a:rect l="l" t="t" r="r" b="b"/>
             <a:pathLst>
-              <a:path w="701995" h="1615703">
+              <a:path w="562880" h="1295518">
                 <a:moveTo>
-                  <a:pt x="0" y="1615703"/>
+                  <a:pt x="0" y="1295518"/>
                 </a:moveTo>
                 <a:lnTo>
-                  <a:pt x="701995" y="1114278"/>
-                </a:lnTo>
-                <a:lnTo>
-                  <a:pt x="701995" y="0"/>
-                </a:lnTo>
-                <a:lnTo>
-                  <a:pt x="0" y="501425"/>
+                  <a:pt x="562880" y="893460"/>
+                </a:lnTo>
+                <a:lnTo>
+                  <a:pt x="562880" y="0"/>
+                </a:lnTo>
+                <a:lnTo>
+                  <a:pt x="0" y="402057"/>
                 </a:lnTo>
                 <a:close/>
               </a:path>
@@ -2933,8 +2933,8 @@
         </p:nvSpPr>
         <p:spPr>
           <a:xfrm>
-            <a:off x="8883640" y="2409546"/>
-            <a:ext cx="2228555" cy="0"/>
+            <a:off x="8744525" y="2170130"/>
+            <a:ext cx="1786921" cy="0"/>
           </a:xfrm>
           <a:prstGeom prst="line">
             <a:avLst/>
@@ -2956,8 +2956,8 @@
         </p:nvSpPr>
         <p:spPr>
           <a:xfrm flipV="1">
-            <a:off x="8883640" y="1295269"/>
-            <a:ext cx="0" cy="1114278"/>
+            <a:off x="8744525" y="1276669"/>
+            <a:ext cx="0" cy="893460"/>
           </a:xfrm>
           <a:prstGeom prst="line">
             <a:avLst/>
@@ -2979,8 +2979,8 @@
         </p:nvSpPr>
         <p:spPr>
           <a:xfrm flipH="1">
-            <a:off x="8181645" y="2409546"/>
-            <a:ext cx="701995" cy="501425"/>
+            <a:off x="8181645" y="2170130"/>
+            <a:ext cx="562880" cy="402057"/>
           </a:xfrm>
           <a:prstGeom prst="line">
             <a:avLst/>
@@ -3002,8 +3002,8 @@
         </p:nvSpPr>
         <p:spPr>
           <a:xfrm>
-            <a:off x="8181645" y="2910971"/>
-            <a:ext cx="2228555" cy="0"/>
+            <a:off x="8181645" y="2572187"/>
+            <a:ext cx="1786921" cy="0"/>
           </a:xfrm>
           <a:prstGeom prst="line">
             <a:avLst/>
@@ -3025,8 +3025,8 @@
         </p:nvSpPr>
         <p:spPr>
           <a:xfrm flipV="1">
-            <a:off x="10410200" y="2409546"/>
-            <a:ext cx="701995" cy="501425"/>
+            <a:off x="9968566" y="2170130"/>
+            <a:ext cx="562880" cy="402057"/>
           </a:xfrm>
           <a:prstGeom prst="line">
             <a:avLst/>
@@ -3048,8 +3048,8 @@
         </p:nvSpPr>
         <p:spPr>
           <a:xfrm flipV="1">
-            <a:off x="11112195" y="1295269"/>
-            <a:ext cx="0" cy="1114278"/>
+            <a:off x="10531446" y="1276669"/>
+            <a:ext cx="0" cy="893460"/>
           </a:xfrm>
           <a:prstGeom prst="line">
             <a:avLst/>
@@ -3071,7 +3071,7 @@
         </p:nvSpPr>
         <p:spPr>
           <a:xfrm>
-            <a:off x="8914161" y="2987806"/>
+            <a:off x="8693343" y="2649022"/>
             <a:ext cx="763524" cy="349250"/>
           </a:xfrm>
           <a:prstGeom prst="rect">
@@ -3110,7 +3110,7 @@
         </p:nvSpPr>
         <p:spPr>
           <a:xfrm>
-            <a:off x="10609388" y="2807566"/>
+            <a:off x="10098196" y="2518466"/>
             <a:ext cx="763524" cy="349250"/>
           </a:xfrm>
           <a:prstGeom prst="rect">
@@ -3149,7 +3149,7 @@
         </p:nvSpPr>
         <p:spPr>
           <a:xfrm>
-            <a:off x="11116005" y="1677783"/>
+            <a:off x="10535256" y="1548774"/>
             <a:ext cx="763524" cy="349250"/>
           </a:xfrm>
           <a:prstGeom prst="rect">
@@ -3357,7 +3357,7 @@
       </p:sp>
       <p:sp>
         <p:nvSpPr>
-          <p:cNvPr id="3" name="S10-text272"/>
+          <p:cNvPr id="3" name="S10-text270"/>
           <p:cNvSpPr txBox="1"/>
           <p:nvPr/>
         </p:nvSpPr>
@@ -3396,7 +3396,7 @@
       </p:sp>
       <p:sp>
         <p:nvSpPr>
-          <p:cNvPr id="4" name="S10-mark273"/>
+          <p:cNvPr id="4" name="S10-mark271"/>
           <p:cNvSpPr/>
           <p:nvPr/>
         </p:nvSpPr>
@@ -3430,14 +3430,14 @@
             </a:pathLst>
           </a:custGeom>
           <a:solidFill>
-            <a:srgbClr val="F2C14E"/>
+            <a:srgbClr val="FDEBDD"/>
           </a:solidFill>
           <a:ln/>
         </p:spPr>
       </p:sp>
       <p:sp>
         <p:nvSpPr>
-          <p:cNvPr id="5" name="S10-mark274"/>
+          <p:cNvPr id="5" name="S10-mark272"/>
           <p:cNvSpPr/>
           <p:nvPr/>
         </p:nvSpPr>
@@ -3471,14 +3471,14 @@
             </a:pathLst>
           </a:custGeom>
           <a:solidFill>
-            <a:srgbClr val="CDEBE6"/>
+            <a:srgbClr val="FDEBDD"/>
           </a:solidFill>
           <a:ln/>
         </p:spPr>
       </p:sp>
       <p:sp>
         <p:nvSpPr>
-          <p:cNvPr id="6" name="S10-mark275"/>
+          <p:cNvPr id="6" name="S10-mark273"/>
           <p:cNvSpPr/>
           <p:nvPr/>
         </p:nvSpPr>
@@ -3512,14 +3512,14 @@
             </a:pathLst>
           </a:custGeom>
           <a:solidFill>
-            <a:srgbClr val="F2C14E"/>
+            <a:srgbClr val="FDEBDD"/>
           </a:solidFill>
           <a:ln/>
         </p:spPr>
       </p:sp>
       <p:sp>
         <p:nvSpPr>
-          <p:cNvPr id="7" name="S10-mark276"/>
+          <p:cNvPr id="7" name="S10-mark274"/>
           <p:cNvSpPr/>
           <p:nvPr/>
         </p:nvSpPr>
@@ -3553,14 +3553,14 @@
             </a:pathLst>
           </a:custGeom>
           <a:solidFill>
-            <a:srgbClr val="CDEBE6"/>
+            <a:srgbClr val="FDEBDD"/>
           </a:solidFill>
           <a:ln/>
         </p:spPr>
       </p:sp>
       <p:sp>
         <p:nvSpPr>
-          <p:cNvPr id="8" name="S10-mark277"/>
+          <p:cNvPr id="8" name="S10-mark275"/>
           <p:cNvSpPr/>
           <p:nvPr/>
         </p:nvSpPr>
@@ -3601,7 +3601,7 @@
       </p:sp>
       <p:sp>
         <p:nvSpPr>
-          <p:cNvPr id="9" name="S10-mark278"/>
+          <p:cNvPr id="9" name="S10-mark276"/>
           <p:cNvSpPr/>
           <p:nvPr/>
         </p:nvSpPr>
@@ -3642,7 +3642,7 @@
       </p:sp>
       <p:sp>
         <p:nvSpPr>
-          <p:cNvPr id="10" name="S10-mark279"/>
+          <p:cNvPr id="10" name="S10-mark277"/>
           <p:cNvSpPr/>
           <p:nvPr/>
         </p:nvSpPr>
@@ -3665,7 +3665,7 @@
       </p:sp>
       <p:sp>
         <p:nvSpPr>
-          <p:cNvPr id="11" name="S10-mark280"/>
+          <p:cNvPr id="11" name="S10-mark278"/>
           <p:cNvSpPr/>
           <p:nvPr/>
         </p:nvSpPr>
@@ -3688,7 +3688,7 @@
       </p:sp>
       <p:sp>
         <p:nvSpPr>
-          <p:cNvPr id="12" name="S10-mark281"/>
+          <p:cNvPr id="12" name="S10-mark279"/>
           <p:cNvSpPr/>
           <p:nvPr/>
         </p:nvSpPr>
@@ -3711,7 +3711,7 @@
       </p:sp>
       <p:sp>
         <p:nvSpPr>
-          <p:cNvPr id="13" name="S10-mark282"/>
+          <p:cNvPr id="13" name="S10-mark280"/>
           <p:cNvSpPr/>
           <p:nvPr/>
         </p:nvSpPr>
@@ -3734,7 +3734,7 @@
       </p:sp>
       <p:sp>
         <p:nvSpPr>
-          <p:cNvPr id="14" name="S10-mark283"/>
+          <p:cNvPr id="14" name="S10-mark281"/>
           <p:cNvSpPr/>
           <p:nvPr/>
         </p:nvSpPr>
@@ -3757,7 +3757,7 @@
       </p:sp>
       <p:sp>
         <p:nvSpPr>
-          <p:cNvPr id="15" name="S10-mark284"/>
+          <p:cNvPr id="15" name="S10-mark282"/>
           <p:cNvSpPr/>
           <p:nvPr/>
         </p:nvSpPr>
@@ -3780,7 +3780,7 @@
       </p:sp>
       <p:sp>
         <p:nvSpPr>
-          <p:cNvPr id="16" name="S10-mark285"/>
+          <p:cNvPr id="16" name="S10-mark283"/>
           <p:cNvSpPr/>
           <p:nvPr/>
         </p:nvSpPr>
@@ -3803,7 +3803,7 @@
       </p:sp>
       <p:sp>
         <p:nvSpPr>
-          <p:cNvPr id="17" name="S10-mark286"/>
+          <p:cNvPr id="17" name="S10-mark284"/>
           <p:cNvSpPr/>
           <p:nvPr/>
         </p:nvSpPr>
@@ -3826,7 +3826,7 @@
       </p:sp>
       <p:sp>
         <p:nvSpPr>
-          <p:cNvPr id="18" name="S10-mark287"/>
+          <p:cNvPr id="18" name="S10-mark285"/>
           <p:cNvSpPr/>
           <p:nvPr/>
         </p:nvSpPr>
@@ -3849,7 +3849,7 @@
       </p:sp>
       <p:sp>
         <p:nvSpPr>
-          <p:cNvPr id="19" name="S10-mark288"/>
+          <p:cNvPr id="19" name="S10-mark286"/>
           <p:cNvSpPr/>
           <p:nvPr/>
         </p:nvSpPr>
@@ -3872,7 +3872,7 @@
       </p:sp>
       <p:sp>
         <p:nvSpPr>
-          <p:cNvPr id="20" name="S10-mark289"/>
+          <p:cNvPr id="20" name="S10-mark287"/>
           <p:cNvSpPr/>
           <p:nvPr/>
         </p:nvSpPr>
@@ -3895,7 +3895,7 @@
       </p:sp>
       <p:sp>
         <p:nvSpPr>
-          <p:cNvPr id="21" name="S10-mark290"/>
+          <p:cNvPr id="21" name="S10-mark288"/>
           <p:cNvSpPr/>
           <p:nvPr/>
         </p:nvSpPr>
@@ -3918,7 +3918,7 @@
       </p:sp>
       <p:sp>
         <p:nvSpPr>
-          <p:cNvPr id="22" name="S10-mark291"/>
+          <p:cNvPr id="22" name="S10-mark289"/>
           <p:cNvSpPr/>
           <p:nvPr/>
         </p:nvSpPr>
@@ -3941,7 +3941,7 @@
       </p:sp>
       <p:sp>
         <p:nvSpPr>
-          <p:cNvPr id="23" name="S10-mark292"/>
+          <p:cNvPr id="23" name="S10-mark290"/>
           <p:cNvSpPr/>
           <p:nvPr/>
         </p:nvSpPr>
@@ -3964,7 +3964,7 @@
       </p:sp>
       <p:sp>
         <p:nvSpPr>
-          <p:cNvPr id="24" name="S10-mark293"/>
+          <p:cNvPr id="24" name="S10-mark291"/>
           <p:cNvSpPr/>
           <p:nvPr/>
         </p:nvSpPr>
@@ -3987,7 +3987,7 @@
       </p:sp>
       <p:sp>
         <p:nvSpPr>
-          <p:cNvPr id="25" name="S10-mark294"/>
+          <p:cNvPr id="25" name="S10-mark292"/>
           <p:cNvSpPr/>
           <p:nvPr/>
         </p:nvSpPr>
@@ -4010,7 +4010,7 @@
       </p:sp>
       <p:sp>
         <p:nvSpPr>
-          <p:cNvPr id="26" name="S10-mark295"/>
+          <p:cNvPr id="26" name="S10-mark293"/>
           <p:cNvSpPr/>
           <p:nvPr/>
         </p:nvSpPr>
@@ -4033,7 +4033,7 @@
       </p:sp>
       <p:sp>
         <p:nvSpPr>
-          <p:cNvPr id="27" name="S10-mark296"/>
+          <p:cNvPr id="27" name="S10-mark294"/>
           <p:cNvSpPr/>
           <p:nvPr/>
         </p:nvSpPr>
@@ -4056,7 +4056,7 @@
       </p:sp>
       <p:sp>
         <p:nvSpPr>
-          <p:cNvPr id="28" name="S10-mark297"/>
+          <p:cNvPr id="28" name="S10-mark295"/>
           <p:cNvSpPr/>
           <p:nvPr/>
         </p:nvSpPr>
@@ -4079,7 +4079,7 @@
       </p:sp>
       <p:sp>
         <p:nvSpPr>
-          <p:cNvPr id="29" name="S10-mark298"/>
+          <p:cNvPr id="29" name="S10-mark296"/>
           <p:cNvSpPr/>
           <p:nvPr/>
         </p:nvSpPr>
@@ -4102,7 +4102,7 @@
       </p:sp>
       <p:sp>
         <p:nvSpPr>
-          <p:cNvPr id="30" name="S10-mark299"/>
+          <p:cNvPr id="30" name="S10-mark297"/>
           <p:cNvSpPr/>
           <p:nvPr/>
         </p:nvSpPr>
@@ -4125,7 +4125,7 @@
       </p:sp>
       <p:sp>
         <p:nvSpPr>
-          <p:cNvPr id="31" name="S10-mark300"/>
+          <p:cNvPr id="31" name="S10-mark298"/>
           <p:cNvSpPr/>
           <p:nvPr/>
         </p:nvSpPr>
@@ -4148,7 +4148,7 @@
       </p:sp>
       <p:sp>
         <p:nvSpPr>
-          <p:cNvPr id="32" name="S10-mark301"/>
+          <p:cNvPr id="32" name="S10-mark299"/>
           <p:cNvSpPr/>
           <p:nvPr/>
         </p:nvSpPr>
@@ -4171,7 +4171,7 @@
       </p:sp>
       <p:sp>
         <p:nvSpPr>
-          <p:cNvPr id="33" name="S10-mark302"/>
+          <p:cNvPr id="33" name="S10-mark300"/>
           <p:cNvSpPr/>
           <p:nvPr/>
         </p:nvSpPr>
@@ -4194,7 +4194,7 @@
       </p:sp>
       <p:sp>
         <p:nvSpPr>
-          <p:cNvPr id="34" name="S10-mark303"/>
+          <p:cNvPr id="34" name="S10-mark301"/>
           <p:cNvSpPr/>
           <p:nvPr/>
         </p:nvSpPr>
@@ -4217,7 +4217,7 @@
       </p:sp>
       <p:sp>
         <p:nvSpPr>
-          <p:cNvPr id="35" name="S10-mark304"/>
+          <p:cNvPr id="35" name="S10-mark302"/>
           <p:cNvSpPr/>
           <p:nvPr/>
         </p:nvSpPr>
@@ -4240,7 +4240,7 @@
       </p:sp>
       <p:sp>
         <p:nvSpPr>
-          <p:cNvPr id="36" name="S10-mark305"/>
+          <p:cNvPr id="36" name="S10-mark303"/>
           <p:cNvSpPr/>
           <p:nvPr/>
         </p:nvSpPr>
@@ -4263,7 +4263,7 @@
       </p:sp>
       <p:sp>
         <p:nvSpPr>
-          <p:cNvPr id="37" name="S10-figure306" descr="모눈 위 직육면체의 전개도: 가로 5칸·세로 2칸인 면 2개, 가로 5칸·세로 3칸인 면 2개, 가로 2칸·세로 3칸인 면 2개"/>
+          <p:cNvPr id="37" name="S10-figure304" descr="모눈 위 직육면체의 전개도: 가로 5칸·세로 2칸인 면 2개, 가로 5칸·세로 3칸인 면 2개, 가로 2칸·세로 3칸인 면 2개"/>
           <p:cNvSpPr/>
           <p:nvPr/>
         </p:nvSpPr>
@@ -4307,7 +4307,7 @@
       </p:sp>
       <p:sp>
         <p:nvSpPr>
-          <p:cNvPr id="38" name="S10-mark307"/>
+          <p:cNvPr id="38" name="S10-mark305"/>
           <p:cNvSpPr/>
           <p:nvPr/>
         </p:nvSpPr>
@@ -4351,7 +4351,7 @@
       </p:sp>
       <p:sp>
         <p:nvSpPr>
-          <p:cNvPr id="39" name="S10-mark308"/>
+          <p:cNvPr id="39" name="S10-mark306"/>
           <p:cNvSpPr/>
           <p:nvPr/>
         </p:nvSpPr>
@@ -4395,7 +4395,7 @@
       </p:sp>
       <p:sp>
         <p:nvSpPr>
-          <p:cNvPr id="40" name="S10-mark309"/>
+          <p:cNvPr id="40" name="S10-mark307"/>
           <p:cNvSpPr/>
           <p:nvPr/>
         </p:nvSpPr>
@@ -4439,7 +4439,7 @@
       </p:sp>
       <p:sp>
         <p:nvSpPr>
-          <p:cNvPr id="41" name="S10-mark310"/>
+          <p:cNvPr id="41" name="S10-mark308"/>
           <p:cNvSpPr/>
           <p:nvPr/>
         </p:nvSpPr>
@@ -4483,7 +4483,7 @@
       </p:sp>
       <p:sp>
         <p:nvSpPr>
-          <p:cNvPr id="42" name="S10-mark311"/>
+          <p:cNvPr id="42" name="S10-mark309"/>
           <p:cNvSpPr/>
           <p:nvPr/>
         </p:nvSpPr>
@@ -4527,7 +4527,7 @@
       </p:sp>
       <p:sp>
         <p:nvSpPr>
-          <p:cNvPr id="43" name="S10-chip312"/>
+          <p:cNvPr id="43" name="S10-chip310"/>
           <p:cNvSpPr txBox="1"/>
           <p:nvPr/>
         </p:nvSpPr>
@@ -4574,7 +4574,7 @@
       </p:sp>
       <p:sp>
         <p:nvSpPr>
-          <p:cNvPr id="44" name="S10-text313"/>
+          <p:cNvPr id="44" name="S10-text311"/>
           <p:cNvSpPr txBox="1"/>
           <p:nvPr/>
         </p:nvSpPr>
@@ -4630,7 +4630,7 @@
       </p:sp>
       <p:sp>
         <p:nvSpPr>
-          <p:cNvPr id="45" name="S10-chip314"/>
+          <p:cNvPr id="45" name="S10-chip312"/>
           <p:cNvSpPr txBox="1"/>
           <p:nvPr/>
         </p:nvSpPr>
@@ -4677,7 +4677,7 @@
       </p:sp>
       <p:sp>
         <p:nvSpPr>
-          <p:cNvPr id="46" name="S10-text315"/>
+          <p:cNvPr id="46" name="S10-text313"/>
           <p:cNvSpPr txBox="1"/>
           <p:nvPr/>
         </p:nvSpPr>
@@ -4733,7 +4733,7 @@
       </p:sp>
       <p:sp>
         <p:nvSpPr>
-          <p:cNvPr id="47" name="S10-chip316"/>
+          <p:cNvPr id="47" name="S10-chip314"/>
           <p:cNvSpPr txBox="1"/>
           <p:nvPr/>
         </p:nvSpPr>
@@ -4780,7 +4780,7 @@
       </p:sp>
       <p:sp>
         <p:nvSpPr>
-          <p:cNvPr id="48" name="S10-text317"/>
+          <p:cNvPr id="48" name="S10-text315"/>
           <p:cNvSpPr txBox="1"/>
           <p:nvPr/>
         </p:nvSpPr>
@@ -4950,7 +4950,7 @@
       </p:sp>
       <p:sp>
         <p:nvSpPr>
-          <p:cNvPr id="3" name="S12-text318"/>
+          <p:cNvPr id="3" name="S12-text316"/>
           <p:cNvSpPr txBox="1"/>
           <p:nvPr/>
         </p:nvSpPr>
@@ -4989,7 +4989,7 @@
       </p:sp>
       <p:sp>
         <p:nvSpPr>
-          <p:cNvPr id="4" name="S12-card319"/>
+          <p:cNvPr id="4" name="S12-card317"/>
           <p:cNvSpPr/>
           <p:nvPr/>
         </p:nvSpPr>
@@ -5016,7 +5016,7 @@
       </p:sp>
       <p:sp>
         <p:nvSpPr>
-          <p:cNvPr id="5" name="S12-cardtext320"/>
+          <p:cNvPr id="5" name="S12-cardtext318"/>
           <p:cNvSpPr txBox="1"/>
           <p:nvPr/>
         </p:nvSpPr>
@@ -5058,7 +5058,7 @@
       </p:sp>
       <p:sp>
         <p:nvSpPr>
-          <p:cNvPr id="6" name="S12-chip321"/>
+          <p:cNvPr id="6" name="S12-chip319"/>
           <p:cNvSpPr txBox="1"/>
           <p:nvPr/>
         </p:nvSpPr>
@@ -5105,7 +5105,7 @@
       </p:sp>
       <p:sp>
         <p:nvSpPr>
-          <p:cNvPr id="7" name="S12-card322"/>
+          <p:cNvPr id="7" name="S12-card320"/>
           <p:cNvSpPr/>
           <p:nvPr/>
         </p:nvSpPr>
@@ -5132,7 +5132,7 @@
       </p:sp>
       <p:sp>
         <p:nvSpPr>
-          <p:cNvPr id="8" name="S12-cardtext323"/>
+          <p:cNvPr id="8" name="S12-cardtext321"/>
           <p:cNvSpPr txBox="1"/>
           <p:nvPr/>
         </p:nvSpPr>
@@ -5194,7 +5194,7 @@
       </p:sp>
       <p:sp>
         <p:nvSpPr>
-          <p:cNvPr id="9" name="S12-chip324"/>
+          <p:cNvPr id="9" name="S12-chip322"/>
           <p:cNvSpPr txBox="1"/>
           <p:nvPr/>
         </p:nvSpPr>
@@ -5241,7 +5241,7 @@
       </p:sp>
       <p:sp>
         <p:nvSpPr>
-          <p:cNvPr id="10" name="S12-card325"/>
+          <p:cNvPr id="10" name="S12-card323"/>
           <p:cNvSpPr/>
           <p:nvPr/>
         </p:nvSpPr>
@@ -5268,7 +5268,7 @@
       </p:sp>
       <p:sp>
         <p:nvSpPr>
-          <p:cNvPr id="11" name="S12-cardtext326"/>
+          <p:cNvPr id="11" name="S12-cardtext324"/>
           <p:cNvSpPr txBox="1"/>
           <p:nvPr/>
         </p:nvSpPr>
@@ -5310,7 +5310,7 @@
       </p:sp>
       <p:sp>
         <p:nvSpPr>
-          <p:cNvPr id="12" name="S12-chip327"/>
+          <p:cNvPr id="12" name="S12-chip325"/>
           <p:cNvSpPr txBox="1"/>
           <p:nvPr/>
         </p:nvSpPr>
@@ -5357,7 +5357,7 @@
       </p:sp>
       <p:sp>
         <p:nvSpPr>
-          <p:cNvPr id="13" name="S12-card328"/>
+          <p:cNvPr id="13" name="S12-card326"/>
           <p:cNvSpPr/>
           <p:nvPr/>
         </p:nvSpPr>
@@ -5384,7 +5384,7 @@
       </p:sp>
       <p:sp>
         <p:nvSpPr>
-          <p:cNvPr id="14" name="S12-cardtext329"/>
+          <p:cNvPr id="14" name="S12-cardtext327"/>
           <p:cNvSpPr txBox="1"/>
           <p:nvPr/>
         </p:nvSpPr>
@@ -5446,7 +5446,7 @@
       </p:sp>
       <p:sp>
         <p:nvSpPr>
-          <p:cNvPr id="15" name="S12-chip330"/>
+          <p:cNvPr id="15" name="S12-chip328"/>
           <p:cNvSpPr txBox="1"/>
           <p:nvPr/>
         </p:nvSpPr>
@@ -5493,7 +5493,7 @@
       </p:sp>
       <p:sp>
         <p:nvSpPr>
-          <p:cNvPr id="16" name="S12-card331"/>
+          <p:cNvPr id="16" name="S12-card329"/>
           <p:cNvSpPr/>
           <p:nvPr/>
         </p:nvSpPr>
@@ -5520,7 +5520,7 @@
       </p:sp>
       <p:sp>
         <p:nvSpPr>
-          <p:cNvPr id="17" name="S12-cardtext332"/>
+          <p:cNvPr id="17" name="S12-cardtext330"/>
           <p:cNvSpPr txBox="1"/>
           <p:nvPr/>
         </p:nvSpPr>
@@ -5676,7 +5676,7 @@
       </p:sp>
       <p:sp>
         <p:nvSpPr>
-          <p:cNvPr id="3" name="S13-card333"/>
+          <p:cNvPr id="3" name="S13-card331"/>
           <p:cNvSpPr/>
           <p:nvPr/>
         </p:nvSpPr>
@@ -5703,7 +5703,7 @@
       </p:sp>
       <p:sp>
         <p:nvSpPr>
-          <p:cNvPr id="4" name="S13-cardtext334"/>
+          <p:cNvPr id="4" name="S13-cardtext332"/>
           <p:cNvSpPr txBox="1"/>
           <p:nvPr/>
         </p:nvSpPr>
@@ -5745,7 +5745,7 @@
       </p:sp>
       <p:sp>
         <p:nvSpPr>
-          <p:cNvPr id="5" name="S13-chip335"/>
+          <p:cNvPr id="5" name="S13-chip333"/>
           <p:cNvSpPr txBox="1"/>
           <p:nvPr/>
         </p:nvSpPr>
@@ -5792,7 +5792,7 @@
       </p:sp>
       <p:sp>
         <p:nvSpPr>
-          <p:cNvPr id="6" name="S13-chip336"/>
+          <p:cNvPr id="6" name="S13-chip334"/>
           <p:cNvSpPr txBox="1"/>
           <p:nvPr/>
         </p:nvSpPr>
@@ -5839,7 +5839,7 @@
       </p:sp>
       <p:sp>
         <p:nvSpPr>
-          <p:cNvPr id="7" name="S13-text337"/>
+          <p:cNvPr id="7" name="S13-text335"/>
           <p:cNvSpPr txBox="1"/>
           <p:nvPr/>
         </p:nvSpPr>
@@ -5878,7 +5878,7 @@
       </p:sp>
       <p:sp>
         <p:nvSpPr>
-          <p:cNvPr id="8" name="S13-text338"/>
+          <p:cNvPr id="8" name="S13-text336"/>
           <p:cNvSpPr txBox="1"/>
           <p:nvPr/>
         </p:nvSpPr>
@@ -5934,7 +5934,7 @@
       </p:sp>
       <p:sp>
         <p:nvSpPr>
-          <p:cNvPr id="9" name="S13-text339"/>
+          <p:cNvPr id="9" name="S13-text337"/>
           <p:cNvSpPr txBox="1"/>
           <p:nvPr/>
         </p:nvSpPr>
@@ -6007,7 +6007,7 @@
       </p:sp>
       <p:sp>
         <p:nvSpPr>
-          <p:cNvPr id="10" name="S13-text340"/>
+          <p:cNvPr id="10" name="S13-text338"/>
           <p:cNvSpPr txBox="1"/>
           <p:nvPr/>
         </p:nvSpPr>
@@ -6063,7 +6063,7 @@
       </p:sp>
       <p:sp>
         <p:nvSpPr>
-          <p:cNvPr id="11" name="S13-text341"/>
+          <p:cNvPr id="11" name="S13-text339"/>
           <p:cNvSpPr txBox="1"/>
           <p:nvPr/>
         </p:nvSpPr>
@@ -6216,7 +6216,7 @@
       </p:sp>
       <p:sp>
         <p:nvSpPr>
-          <p:cNvPr id="3" name="S14-text342"/>
+          <p:cNvPr id="3" name="S14-text340"/>
           <p:cNvSpPr txBox="1"/>
           <p:nvPr/>
         </p:nvSpPr>
@@ -6255,7 +6255,7 @@
       </p:sp>
       <p:sp>
         <p:nvSpPr>
-          <p:cNvPr id="4" name="S14-cell343"/>
+          <p:cNvPr id="4" name="S14-cell341"/>
           <p:cNvSpPr/>
           <p:nvPr/>
         </p:nvSpPr>
@@ -6280,7 +6280,7 @@
       </p:sp>
       <p:sp>
         <p:nvSpPr>
-          <p:cNvPr id="5" name="S14-cell344"/>
+          <p:cNvPr id="5" name="S14-cell342"/>
           <p:cNvSpPr/>
           <p:nvPr/>
         </p:nvSpPr>
@@ -6305,7 +6305,7 @@
       </p:sp>
       <p:sp>
         <p:nvSpPr>
-          <p:cNvPr id="6" name="S14-cell345"/>
+          <p:cNvPr id="6" name="S14-cell343"/>
           <p:cNvSpPr/>
           <p:nvPr/>
         </p:nvSpPr>
@@ -6330,7 +6330,7 @@
       </p:sp>
       <p:sp>
         <p:nvSpPr>
-          <p:cNvPr id="7" name="S14-cell346"/>
+          <p:cNvPr id="7" name="S14-cell344"/>
           <p:cNvSpPr/>
           <p:nvPr/>
         </p:nvSpPr>
@@ -6355,7 +6355,7 @@
       </p:sp>
       <p:sp>
         <p:nvSpPr>
-          <p:cNvPr id="8" name="S14-cell347"/>
+          <p:cNvPr id="8" name="S14-cell345"/>
           <p:cNvSpPr/>
           <p:nvPr/>
         </p:nvSpPr>
@@ -6380,7 +6380,7 @@
       </p:sp>
       <p:sp>
         <p:nvSpPr>
-          <p:cNvPr id="9" name="S14-cell348"/>
+          <p:cNvPr id="9" name="S14-cell346"/>
           <p:cNvSpPr/>
           <p:nvPr/>
         </p:nvSpPr>
@@ -6405,7 +6405,7 @@
       </p:sp>
       <p:sp>
         <p:nvSpPr>
-          <p:cNvPr id="10" name="S14-cell349"/>
+          <p:cNvPr id="10" name="S14-cell347"/>
           <p:cNvSpPr/>
           <p:nvPr/>
         </p:nvSpPr>
@@ -6430,7 +6430,7 @@
       </p:sp>
       <p:sp>
         <p:nvSpPr>
-          <p:cNvPr id="11" name="S14-cell350"/>
+          <p:cNvPr id="11" name="S14-cell348"/>
           <p:cNvSpPr/>
           <p:nvPr/>
         </p:nvSpPr>
@@ -6455,7 +6455,7 @@
       </p:sp>
       <p:sp>
         <p:nvSpPr>
-          <p:cNvPr id="12" name="S14-cell351"/>
+          <p:cNvPr id="12" name="S14-cell349"/>
           <p:cNvSpPr/>
           <p:nvPr/>
         </p:nvSpPr>
@@ -6480,7 +6480,7 @@
       </p:sp>
       <p:sp>
         <p:nvSpPr>
-          <p:cNvPr id="13" name="S14-cell352"/>
+          <p:cNvPr id="13" name="S14-cell350"/>
           <p:cNvSpPr/>
           <p:nvPr/>
         </p:nvSpPr>
@@ -6505,7 +6505,7 @@
       </p:sp>
       <p:sp>
         <p:nvSpPr>
-          <p:cNvPr id="14" name="S14-cell353"/>
+          <p:cNvPr id="14" name="S14-cell351"/>
           <p:cNvSpPr/>
           <p:nvPr/>
         </p:nvSpPr>
@@ -6530,7 +6530,7 @@
       </p:sp>
       <p:sp>
         <p:nvSpPr>
-          <p:cNvPr id="15" name="S14-cell354"/>
+          <p:cNvPr id="15" name="S14-cell352"/>
           <p:cNvSpPr/>
           <p:nvPr/>
         </p:nvSpPr>
@@ -6555,7 +6555,7 @@
       </p:sp>
       <p:sp>
         <p:nvSpPr>
-          <p:cNvPr id="16" name="S14-cell355"/>
+          <p:cNvPr id="16" name="S14-cell353"/>
           <p:cNvSpPr/>
           <p:nvPr/>
         </p:nvSpPr>
@@ -6580,7 +6580,7 @@
       </p:sp>
       <p:sp>
         <p:nvSpPr>
-          <p:cNvPr id="17" name="S14-cell356"/>
+          <p:cNvPr id="17" name="S14-cell354"/>
           <p:cNvSpPr/>
           <p:nvPr/>
         </p:nvSpPr>
@@ -6605,7 +6605,7 @@
       </p:sp>
       <p:sp>
         <p:nvSpPr>
-          <p:cNvPr id="18" name="S14-cell357"/>
+          <p:cNvPr id="18" name="S14-cell355"/>
           <p:cNvSpPr/>
           <p:nvPr/>
         </p:nvSpPr>
@@ -6630,7 +6630,7 @@
       </p:sp>
       <p:sp>
         <p:nvSpPr>
-          <p:cNvPr id="19" name="S14-figure358" descr="가로 5칸, 세로 3칸인 직사각형: 15칸 모두 색칠"/>
+          <p:cNvPr id="19" name="S14-figure356" descr="가로 5칸, 세로 3칸인 직사각형: 15칸 모두 색칠"/>
           <p:cNvSpPr/>
           <p:nvPr/>
         </p:nvSpPr>
@@ -6657,7 +6657,7 @@
       </p:sp>
       <p:sp>
         <p:nvSpPr>
-          <p:cNvPr id="20" name="S14-card359"/>
+          <p:cNvPr id="20" name="S14-card357"/>
           <p:cNvSpPr/>
           <p:nvPr/>
         </p:nvSpPr>
@@ -6684,7 +6684,7 @@
       </p:sp>
       <p:sp>
         <p:nvSpPr>
-          <p:cNvPr id="21" name="S14-cardtext360"/>
+          <p:cNvPr id="21" name="S14-cardtext358"/>
           <p:cNvSpPr txBox="1"/>
           <p:nvPr/>
         </p:nvSpPr>
@@ -6746,7 +6746,7 @@
       </p:sp>
       <p:sp>
         <p:nvSpPr>
-          <p:cNvPr id="22" name="S14-card361"/>
+          <p:cNvPr id="22" name="S14-card359"/>
           <p:cNvSpPr/>
           <p:nvPr/>
         </p:nvSpPr>
@@ -6773,7 +6773,7 @@
       </p:sp>
       <p:sp>
         <p:nvSpPr>
-          <p:cNvPr id="23" name="S14-cardtext362"/>
+          <p:cNvPr id="23" name="S14-cardtext360"/>
           <p:cNvSpPr txBox="1"/>
           <p:nvPr/>
         </p:nvSpPr>
@@ -6975,8 +6975,8 @@
         </p:nvSpPr>
         <p:spPr>
           <a:xfrm>
-            <a:off x="6553962" y="3268980"/>
-            <a:ext cx="3657600" cy="1828800"/>
+            <a:off x="6361176" y="3019530"/>
+            <a:ext cx="3167876" cy="1583938"/>
           </a:xfrm>
           <a:custGeom>
             <a:avLst/>
@@ -6985,15 +6985,15 @@
             <a:cxnLst/>
             <a:rect l="l" t="t" r="r" b="b"/>
             <a:pathLst>
-              <a:path w="3657600" h="1828800">
+              <a:path w="3167876" h="1583938">
                 <a:moveTo>
-                  <a:pt x="0" y="1828800"/>
+                  <a:pt x="0" y="1583938"/>
                 </a:moveTo>
                 <a:lnTo>
-                  <a:pt x="3657600" y="1828800"/>
-                </a:lnTo>
-                <a:lnTo>
-                  <a:pt x="3657600" y="0"/>
+                  <a:pt x="3167876" y="1583938"/>
+                </a:lnTo>
+                <a:lnTo>
+                  <a:pt x="3167876" y="0"/>
                 </a:lnTo>
                 <a:lnTo>
                   <a:pt x="0" y="0"/>
@@ -7021,8 +7021,8 @@
         </p:nvSpPr>
         <p:spPr>
           <a:xfrm>
-            <a:off x="6553962" y="2446020"/>
-            <a:ext cx="4809744" cy="822960"/>
+            <a:off x="6361176" y="2306758"/>
+            <a:ext cx="4165756" cy="712772"/>
           </a:xfrm>
           <a:custGeom>
             <a:avLst/>
@@ -7031,18 +7031,18 @@
             <a:cxnLst/>
             <a:rect l="l" t="t" r="r" b="b"/>
             <a:pathLst>
-              <a:path w="4809744" h="822960">
+              <a:path w="4165756" h="712772">
                 <a:moveTo>
-                  <a:pt x="0" y="822960"/>
+                  <a:pt x="0" y="712772"/>
                 </a:moveTo>
                 <a:lnTo>
-                  <a:pt x="3657600" y="822960"/>
-                </a:lnTo>
-                <a:lnTo>
-                  <a:pt x="4809744" y="0"/>
-                </a:lnTo>
-                <a:lnTo>
-                  <a:pt x="1152144" y="0"/>
+                  <a:pt x="3167876" y="712772"/>
+                </a:lnTo>
+                <a:lnTo>
+                  <a:pt x="4165756" y="0"/>
+                </a:lnTo>
+                <a:lnTo>
+                  <a:pt x="997881" y="0"/>
                 </a:lnTo>
                 <a:close/>
               </a:path>
@@ -7067,8 +7067,8 @@
         </p:nvSpPr>
         <p:spPr>
           <a:xfrm>
-            <a:off x="10211562" y="2446020"/>
-            <a:ext cx="1152144" cy="2651760"/>
+            <a:off x="9529052" y="2306758"/>
+            <a:ext cx="997881" cy="2296710"/>
           </a:xfrm>
           <a:custGeom>
             <a:avLst/>
@@ -7077,18 +7077,18 @@
             <a:cxnLst/>
             <a:rect l="l" t="t" r="r" b="b"/>
             <a:pathLst>
-              <a:path w="1152144" h="2651760">
+              <a:path w="997881" h="2296710">
                 <a:moveTo>
-                  <a:pt x="0" y="2651760"/>
+                  <a:pt x="0" y="2296710"/>
                 </a:moveTo>
                 <a:lnTo>
-                  <a:pt x="1152144" y="1828800"/>
-                </a:lnTo>
-                <a:lnTo>
-                  <a:pt x="1152144" y="0"/>
-                </a:lnTo>
-                <a:lnTo>
-                  <a:pt x="0" y="822960"/>
+                  <a:pt x="997881" y="1583938"/>
+                </a:lnTo>
+                <a:lnTo>
+                  <a:pt x="997881" y="0"/>
+                </a:lnTo>
+                <a:lnTo>
+                  <a:pt x="0" y="712772"/>
                 </a:lnTo>
                 <a:close/>
               </a:path>
@@ -7113,8 +7113,8 @@
         </p:nvSpPr>
         <p:spPr>
           <a:xfrm>
-            <a:off x="7706106" y="4274820"/>
-            <a:ext cx="3657600" cy="0"/>
+            <a:off x="7359057" y="3890695"/>
+            <a:ext cx="3167876" cy="0"/>
           </a:xfrm>
           <a:prstGeom prst="line">
             <a:avLst/>
@@ -7136,8 +7136,8 @@
         </p:nvSpPr>
         <p:spPr>
           <a:xfrm flipV="1">
-            <a:off x="7706106" y="2446020"/>
-            <a:ext cx="0" cy="1828800"/>
+            <a:off x="7359057" y="2306758"/>
+            <a:ext cx="0" cy="1583938"/>
           </a:xfrm>
           <a:prstGeom prst="line">
             <a:avLst/>
@@ -7159,8 +7159,8 @@
         </p:nvSpPr>
         <p:spPr>
           <a:xfrm flipH="1">
-            <a:off x="6553962" y="4274820"/>
-            <a:ext cx="1152144" cy="822960"/>
+            <a:off x="6361176" y="3890695"/>
+            <a:ext cx="997881" cy="712772"/>
           </a:xfrm>
           <a:prstGeom prst="line">
             <a:avLst/>
@@ -7182,8 +7182,8 @@
         </p:nvSpPr>
         <p:spPr>
           <a:xfrm>
-            <a:off x="6553962" y="5097780"/>
-            <a:ext cx="3657600" cy="0"/>
+            <a:off x="6361176" y="4603467"/>
+            <a:ext cx="3167876" cy="0"/>
           </a:xfrm>
           <a:prstGeom prst="line">
             <a:avLst/>
@@ -7205,8 +7205,8 @@
         </p:nvSpPr>
         <p:spPr>
           <a:xfrm flipV="1">
-            <a:off x="10211562" y="4274820"/>
-            <a:ext cx="1152144" cy="822960"/>
+            <a:off x="9529052" y="3890695"/>
+            <a:ext cx="997881" cy="712772"/>
           </a:xfrm>
           <a:prstGeom prst="line">
             <a:avLst/>
@@ -7228,8 +7228,8 @@
         </p:nvSpPr>
         <p:spPr>
           <a:xfrm flipV="1">
-            <a:off x="11363706" y="2446020"/>
-            <a:ext cx="0" cy="1828800"/>
+            <a:off x="10526932" y="2306758"/>
+            <a:ext cx="0" cy="1583938"/>
           </a:xfrm>
           <a:prstGeom prst="line">
             <a:avLst/>
@@ -9440,7 +9440,7 @@
               <a:buNone/>
             </a:pPr>
             <a:r>
-              <a:rPr lang="ko-KR" altLang="en-US" sz="2800" dirty="0">
+              <a:rPr lang="en-US" altLang="ko-KR" sz="2800" dirty="0">
                 <a:solidFill>
                   <a:srgbClr val="1F2937"/>
                 </a:solidFill>
@@ -9448,7 +9448,7 @@
                 <a:ea typeface="맑은 고딕" pitchFamily="34" charset="-122"/>
                 <a:cs typeface="맑은 고딕" pitchFamily="34" charset="-120"/>
               </a:rPr>
-              <a:t>(세 면의 넓이의 합) × 2 = 52 cm²</a:t>
+              <a:t>(12 + 8 + 6) × 2 = 52 (cm²)</a:t>
             </a:r>
             <a:endParaRPr lang="ko-KR" sz="2800" dirty="0"/>
           </a:p>
@@ -9462,8 +9462,8 @@
         </p:nvSpPr>
         <p:spPr>
           <a:xfrm>
-            <a:off x="7850632" y="2879354"/>
-            <a:ext cx="2501137" cy="1250569"/>
+            <a:off x="7850632" y="2746957"/>
+            <a:ext cx="2005485" cy="1002742"/>
           </a:xfrm>
           <a:custGeom>
             <a:avLst/>
@@ -9472,15 +9472,15 @@
             <a:cxnLst/>
             <a:rect l="l" t="t" r="r" b="b"/>
             <a:pathLst>
-              <a:path w="2501137" h="1250569">
+              <a:path w="2005485" h="1002742">
                 <a:moveTo>
-                  <a:pt x="0" y="1250569"/>
+                  <a:pt x="0" y="1002742"/>
                 </a:moveTo>
                 <a:lnTo>
-                  <a:pt x="2501137" y="1250569"/>
-                </a:lnTo>
-                <a:lnTo>
-                  <a:pt x="2501137" y="0"/>
+                  <a:pt x="2005485" y="1002742"/>
+                </a:lnTo>
+                <a:lnTo>
+                  <a:pt x="2005485" y="0"/>
                 </a:lnTo>
                 <a:lnTo>
                   <a:pt x="0" y="0"/>
@@ -9508,8 +9508,8 @@
         </p:nvSpPr>
         <p:spPr>
           <a:xfrm>
-            <a:off x="7850632" y="2316598"/>
-            <a:ext cx="3288995" cy="562756"/>
+            <a:off x="7850632" y="2295723"/>
+            <a:ext cx="2637213" cy="451234"/>
           </a:xfrm>
           <a:custGeom>
             <a:avLst/>
@@ -9518,18 +9518,18 @@
             <a:cxnLst/>
             <a:rect l="l" t="t" r="r" b="b"/>
             <a:pathLst>
-              <a:path w="3288995" h="562756">
+              <a:path w="2637213" h="451234">
                 <a:moveTo>
-                  <a:pt x="0" y="562756"/>
+                  <a:pt x="0" y="451234"/>
                 </a:moveTo>
                 <a:lnTo>
-                  <a:pt x="2501137" y="562756"/>
-                </a:lnTo>
-                <a:lnTo>
-                  <a:pt x="3288995" y="0"/>
-                </a:lnTo>
-                <a:lnTo>
-                  <a:pt x="787858" y="0"/>
+                  <a:pt x="2005485" y="451234"/>
+                </a:lnTo>
+                <a:lnTo>
+                  <a:pt x="2637213" y="0"/>
+                </a:lnTo>
+                <a:lnTo>
+                  <a:pt x="631728" y="0"/>
                 </a:lnTo>
                 <a:close/>
               </a:path>
@@ -9554,8 +9554,8 @@
         </p:nvSpPr>
         <p:spPr>
           <a:xfrm>
-            <a:off x="10351769" y="2316598"/>
-            <a:ext cx="787858" cy="1813324"/>
+            <a:off x="9856117" y="2295723"/>
+            <a:ext cx="631728" cy="1453977"/>
           </a:xfrm>
           <a:custGeom>
             <a:avLst/>
@@ -9564,18 +9564,18 @@
             <a:cxnLst/>
             <a:rect l="l" t="t" r="r" b="b"/>
             <a:pathLst>
-              <a:path w="787858" h="1813324">
+              <a:path w="631728" h="1453977">
                 <a:moveTo>
-                  <a:pt x="0" y="1813324"/>
+                  <a:pt x="0" y="1453977"/>
                 </a:moveTo>
                 <a:lnTo>
-                  <a:pt x="787858" y="1250569"/>
-                </a:lnTo>
-                <a:lnTo>
-                  <a:pt x="787858" y="0"/>
-                </a:lnTo>
-                <a:lnTo>
-                  <a:pt x="0" y="562756"/>
+                  <a:pt x="631728" y="1002742"/>
+                </a:lnTo>
+                <a:lnTo>
+                  <a:pt x="631728" y="0"/>
+                </a:lnTo>
+                <a:lnTo>
+                  <a:pt x="0" y="451234"/>
                 </a:lnTo>
                 <a:close/>
               </a:path>
@@ -9600,8 +9600,8 @@
         </p:nvSpPr>
         <p:spPr>
           <a:xfrm>
-            <a:off x="8638490" y="3567166"/>
-            <a:ext cx="2501137" cy="0"/>
+            <a:off x="8482360" y="3298466"/>
+            <a:ext cx="2005485" cy="0"/>
           </a:xfrm>
           <a:prstGeom prst="line">
             <a:avLst/>
@@ -9623,8 +9623,8 @@
         </p:nvSpPr>
         <p:spPr>
           <a:xfrm flipV="1">
-            <a:off x="8638490" y="2316598"/>
-            <a:ext cx="0" cy="1250569"/>
+            <a:off x="8482360" y="2295723"/>
+            <a:ext cx="0" cy="1002742"/>
           </a:xfrm>
           <a:prstGeom prst="line">
             <a:avLst/>
@@ -9646,8 +9646,8 @@
         </p:nvSpPr>
         <p:spPr>
           <a:xfrm flipH="1">
-            <a:off x="7850632" y="3567166"/>
-            <a:ext cx="787858" cy="562756"/>
+            <a:off x="7850632" y="3298466"/>
+            <a:ext cx="631728" cy="451234"/>
           </a:xfrm>
           <a:prstGeom prst="line">
             <a:avLst/>
@@ -9669,8 +9669,8 @@
         </p:nvSpPr>
         <p:spPr>
           <a:xfrm>
-            <a:off x="7850632" y="4129922"/>
-            <a:ext cx="2501137" cy="0"/>
+            <a:off x="7850632" y="3749700"/>
+            <a:ext cx="2005485" cy="0"/>
           </a:xfrm>
           <a:prstGeom prst="line">
             <a:avLst/>
@@ -9692,8 +9692,8 @@
         </p:nvSpPr>
         <p:spPr>
           <a:xfrm flipV="1">
-            <a:off x="10351769" y="3567166"/>
-            <a:ext cx="787858" cy="562756"/>
+            <a:off x="9856117" y="3298466"/>
+            <a:ext cx="631728" cy="451234"/>
           </a:xfrm>
           <a:prstGeom prst="line">
             <a:avLst/>
@@ -9715,8 +9715,8 @@
         </p:nvSpPr>
         <p:spPr>
           <a:xfrm flipV="1">
-            <a:off x="11139627" y="2316598"/>
-            <a:ext cx="0" cy="1250569"/>
+            <a:off x="10487845" y="2295723"/>
+            <a:ext cx="0" cy="1002742"/>
           </a:xfrm>
           <a:prstGeom prst="line">
             <a:avLst/>
@@ -9738,7 +9738,7 @@
         </p:nvSpPr>
         <p:spPr>
           <a:xfrm>
-            <a:off x="8719439" y="4206757"/>
+            <a:off x="8471612" y="3826535"/>
             <a:ext cx="763524" cy="349250"/>
           </a:xfrm>
           <a:prstGeom prst="rect">
@@ -9777,7 +9777,7 @@
         </p:nvSpPr>
         <p:spPr>
           <a:xfrm>
-            <a:off x="10593888" y="3995852"/>
+            <a:off x="10020171" y="3671390"/>
             <a:ext cx="763524" cy="349250"/>
           </a:xfrm>
           <a:prstGeom prst="rect">
@@ -9816,7 +9816,7 @@
         </p:nvSpPr>
         <p:spPr>
           <a:xfrm>
-            <a:off x="11143437" y="2767257"/>
+            <a:off x="10491655" y="2622469"/>
             <a:ext cx="763524" cy="349250"/>
           </a:xfrm>
           <a:prstGeom prst="rect">
@@ -10294,7 +10294,7 @@
                 <a:ea typeface="맑은 고딕" pitchFamily="34" charset="-122"/>
                 <a:cs typeface="맑은 고딕" pitchFamily="34" charset="-120"/>
               </a:rPr>
-              <a:t>모두</a:t>
+              <a:t>세 면의 합 × 2</a:t>
             </a:r>
             <a:endParaRPr lang="ko-KR" sz="2800" dirty="0"/>
           </a:p>
@@ -10325,7 +10325,7 @@
               <a:buNone/>
             </a:pPr>
             <a:r>
-              <a:rPr lang="ko-KR" altLang="en-US" sz="1600" b="1" dirty="0">
+              <a:rPr lang="ko-KR" altLang="en-US" sz="2800" b="1" dirty="0">
                 <a:solidFill>
                   <a:srgbClr val="1F2937"/>
                 </a:solidFill>
@@ -10333,9 +10333,9 @@
                 <a:ea typeface="맑은 고딕" pitchFamily="34" charset="-122"/>
                 <a:cs typeface="맑은 고딕" pitchFamily="34" charset="-120"/>
               </a:rPr>
-              <a:t>(12 + 8 + 6) × 2 = 52</a:t>
-            </a:r>
-            <a:endParaRPr lang="ko-KR" sz="1600" dirty="0"/>
+              <a:t>26 × 2 = 52</a:t>
+            </a:r>
+            <a:endParaRPr lang="ko-KR" sz="2800" dirty="0"/>
           </a:p>
         </p:txBody>
       </p:sp>
@@ -11659,7 +11659,7 @@
         </p:nvSpPr>
         <p:spPr>
           <a:xfrm>
-            <a:off x="1024204" y="3184284"/>
+            <a:off x="1024204" y="3928598"/>
             <a:ext cx="5484419" cy="0"/>
           </a:xfrm>
           <a:prstGeom prst="line">
@@ -11762,46 +11762,7 @@
         </p:nvSpPr>
         <p:spPr>
           <a:xfrm>
-            <a:off x="4221226" y="3597275"/>
-            <a:ext cx="657352" cy="349250"/>
-          </a:xfrm>
-          <a:prstGeom prst="rect">
-            <a:avLst/>
-          </a:prstGeom>
-          <a:noFill/>
-          <a:ln/>
-        </p:spPr>
-        <p:txBody>
-          <a:bodyPr wrap="square" lIns="0" tIns="0" rIns="0" bIns="0" rtlCol="0" anchor="ctr"/>
-          <a:lstStyle/>
-          <a:p>
-            <a:pPr eaLnBrk="0" algn="ctr" indent="0" marL="0">
-              <a:buNone/>
-            </a:pPr>
-            <a:r>
-              <a:rPr lang="ko-KR" altLang="en-US" sz="2200" b="1" dirty="0">
-                <a:solidFill>
-                  <a:srgbClr val="1F2937"/>
-                </a:solidFill>
-                <a:latin typeface="맑은 고딕" pitchFamily="34" charset="0"/>
-                <a:ea typeface="맑은 고딕" pitchFamily="34" charset="-122"/>
-                <a:cs typeface="맑은 고딕" pitchFamily="34" charset="-120"/>
-              </a:rPr>
-              <a:t>옆면</a:t>
-            </a:r>
-            <a:endParaRPr lang="ko-KR" sz="2200" dirty="0"/>
-          </a:p>
-        </p:txBody>
-      </p:sp>
-      <p:sp>
-        <p:nvSpPr>
-          <p:cNvPr id="48" name="S05-label169"/>
-          <p:cNvSpPr txBox="1"/>
-          <p:nvPr/>
-        </p:nvSpPr>
-        <p:spPr>
-          <a:xfrm>
-            <a:off x="3361258" y="2774612"/>
+            <a:off x="2969514" y="2931310"/>
             <a:ext cx="3160776" cy="349250"/>
           </a:xfrm>
           <a:prstGeom prst="rect">
@@ -11834,7 +11795,7 @@
       </p:sp>
       <p:sp>
         <p:nvSpPr>
-          <p:cNvPr id="49" name="S05-card170"/>
+          <p:cNvPr id="48" name="S05-card168"/>
           <p:cNvSpPr/>
           <p:nvPr/>
         </p:nvSpPr>
@@ -11861,7 +11822,7 @@
       </p:sp>
       <p:sp>
         <p:nvSpPr>
-          <p:cNvPr id="50" name="S05-cardtext171"/>
+          <p:cNvPr id="49" name="S05-cardtext169"/>
           <p:cNvSpPr txBox="1"/>
           <p:nvPr/>
         </p:nvSpPr>
@@ -11943,7 +11904,7 @@
       </p:sp>
       <p:sp>
         <p:nvSpPr>
-          <p:cNvPr id="51" name="S05-card172"/>
+          <p:cNvPr id="50" name="S05-card170"/>
           <p:cNvSpPr/>
           <p:nvPr/>
         </p:nvSpPr>
@@ -11970,7 +11931,7 @@
       </p:sp>
       <p:sp>
         <p:nvSpPr>
-          <p:cNvPr id="52" name="S05-cardtext173"/>
+          <p:cNvPr id="51" name="S05-cardtext171"/>
           <p:cNvSpPr txBox="1"/>
           <p:nvPr/>
         </p:nvSpPr>
@@ -12032,7 +11993,7 @@
       </p:sp>
       <p:sp>
         <p:nvSpPr>
-          <p:cNvPr id="53" name="S05-card174"/>
+          <p:cNvPr id="52" name="S05-card172"/>
           <p:cNvSpPr/>
           <p:nvPr/>
         </p:nvSpPr>
@@ -12059,7 +12020,7 @@
       </p:sp>
       <p:sp>
         <p:nvSpPr>
-          <p:cNvPr id="54" name="S05-cardtext175"/>
+          <p:cNvPr id="53" name="S05-cardtext173"/>
           <p:cNvSpPr txBox="1"/>
           <p:nvPr/>
         </p:nvSpPr>
@@ -12235,7 +12196,7 @@
       </p:sp>
       <p:sp>
         <p:nvSpPr>
-          <p:cNvPr id="3" name="S06-card176"/>
+          <p:cNvPr id="3" name="S06-card174"/>
           <p:cNvSpPr/>
           <p:nvPr/>
         </p:nvSpPr>
@@ -12262,7 +12223,7 @@
       </p:sp>
       <p:sp>
         <p:nvSpPr>
-          <p:cNvPr id="4" name="S06-cardtext177"/>
+          <p:cNvPr id="4" name="S06-cardtext175"/>
           <p:cNvSpPr txBox="1"/>
           <p:nvPr/>
         </p:nvSpPr>
@@ -12304,7 +12265,7 @@
       </p:sp>
       <p:sp>
         <p:nvSpPr>
-          <p:cNvPr id="5" name="S06-card178"/>
+          <p:cNvPr id="5" name="S06-card176"/>
           <p:cNvSpPr/>
           <p:nvPr/>
         </p:nvSpPr>
@@ -12331,7 +12292,7 @@
       </p:sp>
       <p:sp>
         <p:nvSpPr>
-          <p:cNvPr id="6" name="S06-cardtext179"/>
+          <p:cNvPr id="6" name="S06-cardtext177"/>
           <p:cNvSpPr txBox="1"/>
           <p:nvPr/>
         </p:nvSpPr>
@@ -12373,7 +12334,7 @@
       </p:sp>
       <p:sp>
         <p:nvSpPr>
-          <p:cNvPr id="7" name="S06-chip180"/>
+          <p:cNvPr id="7" name="S06-chip178"/>
           <p:cNvSpPr txBox="1"/>
           <p:nvPr/>
         </p:nvSpPr>
@@ -12420,7 +12381,7 @@
       </p:sp>
       <p:sp>
         <p:nvSpPr>
-          <p:cNvPr id="8" name="S06-text181"/>
+          <p:cNvPr id="8" name="S06-text179"/>
           <p:cNvSpPr txBox="1"/>
           <p:nvPr/>
         </p:nvSpPr>
@@ -12459,7 +12420,7 @@
       </p:sp>
       <p:sp>
         <p:nvSpPr>
-          <p:cNvPr id="9" name="S06-chip182"/>
+          <p:cNvPr id="9" name="S06-chip180"/>
           <p:cNvSpPr txBox="1"/>
           <p:nvPr/>
         </p:nvSpPr>
@@ -12506,7 +12467,7 @@
       </p:sp>
       <p:sp>
         <p:nvSpPr>
-          <p:cNvPr id="10" name="S06-text183"/>
+          <p:cNvPr id="10" name="S06-text181"/>
           <p:cNvSpPr txBox="1"/>
           <p:nvPr/>
         </p:nvSpPr>
@@ -12659,7 +12620,7 @@
       </p:sp>
       <p:sp>
         <p:nvSpPr>
-          <p:cNvPr id="3" name="S07-card184"/>
+          <p:cNvPr id="3" name="S07-card182"/>
           <p:cNvSpPr/>
           <p:nvPr/>
         </p:nvSpPr>
@@ -12686,7 +12647,7 @@
       </p:sp>
       <p:sp>
         <p:nvSpPr>
-          <p:cNvPr id="4" name="S07-cardtext185"/>
+          <p:cNvPr id="4" name="S07-cardtext183"/>
           <p:cNvSpPr txBox="1"/>
           <p:nvPr/>
         </p:nvSpPr>
@@ -12728,14 +12689,14 @@
       </p:sp>
       <p:sp>
         <p:nvSpPr>
-          <p:cNvPr id="5" name="S07-figure186" descr="가로 5 cm, 세로 4 cm, 높이 3 cm인 직육면체"/>
-          <p:cNvSpPr/>
-          <p:nvPr/>
-        </p:nvSpPr>
-        <p:spPr>
-          <a:xfrm>
-            <a:off x="6778041" y="2635621"/>
-            <a:ext cx="3264660" cy="1958796"/>
+          <p:cNvPr id="5" name="S07-figure184" descr="가로 5 cm, 세로 4 cm, 높이 3 cm인 직육면체"/>
+          <p:cNvSpPr/>
+          <p:nvPr/>
+        </p:nvSpPr>
+        <p:spPr>
+          <a:xfrm>
+            <a:off x="6778041" y="2512726"/>
+            <a:ext cx="2732824" cy="1639694"/>
           </a:xfrm>
           <a:custGeom>
             <a:avLst/>
@@ -12744,15 +12705,15 @@
             <a:cxnLst/>
             <a:rect l="l" t="t" r="r" b="b"/>
             <a:pathLst>
-              <a:path w="3264660" h="1958796">
+              <a:path w="2732824" h="1639694">
                 <a:moveTo>
-                  <a:pt x="0" y="1958796"/>
+                  <a:pt x="0" y="1639694"/>
                 </a:moveTo>
                 <a:lnTo>
-                  <a:pt x="3264660" y="1958796"/>
-                </a:lnTo>
-                <a:lnTo>
-                  <a:pt x="3264660" y="0"/>
+                  <a:pt x="2732824" y="1639694"/>
+                </a:lnTo>
+                <a:lnTo>
+                  <a:pt x="2732824" y="0"/>
                 </a:lnTo>
                 <a:lnTo>
                   <a:pt x="0" y="0"/>
@@ -12774,14 +12735,14 @@
       </p:sp>
       <p:sp>
         <p:nvSpPr>
-          <p:cNvPr id="6" name="S07-mark187"/>
-          <p:cNvSpPr/>
-          <p:nvPr/>
-        </p:nvSpPr>
-        <p:spPr>
-          <a:xfrm>
-            <a:off x="6778041" y="1852103"/>
-            <a:ext cx="4361586" cy="783519"/>
+          <p:cNvPr id="6" name="S07-mark185"/>
+          <p:cNvSpPr/>
+          <p:nvPr/>
+        </p:nvSpPr>
+        <p:spPr>
+          <a:xfrm>
+            <a:off x="6778041" y="1856848"/>
+            <a:ext cx="3651052" cy="655878"/>
           </a:xfrm>
           <a:custGeom>
             <a:avLst/>
@@ -12790,18 +12751,18 @@
             <a:cxnLst/>
             <a:rect l="l" t="t" r="r" b="b"/>
             <a:pathLst>
-              <a:path w="4361586" h="783519">
+              <a:path w="3651052" h="655878">
                 <a:moveTo>
-                  <a:pt x="0" y="783519"/>
+                  <a:pt x="0" y="655878"/>
                 </a:moveTo>
                 <a:lnTo>
-                  <a:pt x="3264660" y="783519"/>
-                </a:lnTo>
-                <a:lnTo>
-                  <a:pt x="4361586" y="0"/>
-                </a:lnTo>
-                <a:lnTo>
-                  <a:pt x="1096926" y="0"/>
+                  <a:pt x="2732824" y="655878"/>
+                </a:lnTo>
+                <a:lnTo>
+                  <a:pt x="3651052" y="0"/>
+                </a:lnTo>
+                <a:lnTo>
+                  <a:pt x="918229" y="0"/>
                 </a:lnTo>
                 <a:close/>
               </a:path>
@@ -12820,14 +12781,14 @@
       </p:sp>
       <p:sp>
         <p:nvSpPr>
-          <p:cNvPr id="7" name="S07-mark188"/>
-          <p:cNvSpPr/>
-          <p:nvPr/>
-        </p:nvSpPr>
-        <p:spPr>
-          <a:xfrm>
-            <a:off x="10042701" y="1852103"/>
-            <a:ext cx="1096926" cy="2742315"/>
+          <p:cNvPr id="7" name="S07-mark186"/>
+          <p:cNvSpPr/>
+          <p:nvPr/>
+        </p:nvSpPr>
+        <p:spPr>
+          <a:xfrm>
+            <a:off x="9510864" y="1856848"/>
+            <a:ext cx="918229" cy="2295572"/>
           </a:xfrm>
           <a:custGeom>
             <a:avLst/>
@@ -12836,18 +12797,18 @@
             <a:cxnLst/>
             <a:rect l="l" t="t" r="r" b="b"/>
             <a:pathLst>
-              <a:path w="1096926" h="2742315">
+              <a:path w="918229" h="2295572">
                 <a:moveTo>
-                  <a:pt x="0" y="2742315"/>
+                  <a:pt x="0" y="2295572"/>
                 </a:moveTo>
                 <a:lnTo>
-                  <a:pt x="1096926" y="1958796"/>
-                </a:lnTo>
-                <a:lnTo>
-                  <a:pt x="1096926" y="0"/>
-                </a:lnTo>
-                <a:lnTo>
-                  <a:pt x="0" y="783519"/>
+                  <a:pt x="918229" y="1639694"/>
+                </a:lnTo>
+                <a:lnTo>
+                  <a:pt x="918229" y="0"/>
+                </a:lnTo>
+                <a:lnTo>
+                  <a:pt x="0" y="655878"/>
                 </a:lnTo>
                 <a:close/>
               </a:path>
@@ -12866,14 +12827,14 @@
       </p:sp>
       <p:sp>
         <p:nvSpPr>
-          <p:cNvPr id="8" name="S07-mark189"/>
-          <p:cNvSpPr/>
-          <p:nvPr/>
-        </p:nvSpPr>
-        <p:spPr>
-          <a:xfrm>
-            <a:off x="7874967" y="3810899"/>
-            <a:ext cx="3264660" cy="0"/>
+          <p:cNvPr id="8" name="S07-mark187"/>
+          <p:cNvSpPr/>
+          <p:nvPr/>
+        </p:nvSpPr>
+        <p:spPr>
+          <a:xfrm>
+            <a:off x="7696270" y="3496542"/>
+            <a:ext cx="2732824" cy="0"/>
           </a:xfrm>
           <a:prstGeom prst="line">
             <a:avLst/>
@@ -12889,14 +12850,14 @@
       </p:sp>
       <p:sp>
         <p:nvSpPr>
-          <p:cNvPr id="9" name="S07-mark190"/>
+          <p:cNvPr id="9" name="S07-mark188"/>
           <p:cNvSpPr/>
           <p:nvPr/>
         </p:nvSpPr>
         <p:spPr>
           <a:xfrm flipV="1">
-            <a:off x="7874967" y="1852103"/>
-            <a:ext cx="0" cy="1958796"/>
+            <a:off x="7696270" y="1856848"/>
+            <a:ext cx="0" cy="1639694"/>
           </a:xfrm>
           <a:prstGeom prst="line">
             <a:avLst/>
@@ -12912,14 +12873,14 @@
       </p:sp>
       <p:sp>
         <p:nvSpPr>
-          <p:cNvPr id="10" name="S07-mark191"/>
+          <p:cNvPr id="10" name="S07-mark189"/>
           <p:cNvSpPr/>
           <p:nvPr/>
         </p:nvSpPr>
         <p:spPr>
           <a:xfrm flipH="1">
-            <a:off x="6778041" y="3810899"/>
-            <a:ext cx="1096926" cy="783519"/>
+            <a:off x="6778041" y="3496542"/>
+            <a:ext cx="918229" cy="655878"/>
           </a:xfrm>
           <a:prstGeom prst="line">
             <a:avLst/>
@@ -12935,14 +12896,14 @@
       </p:sp>
       <p:sp>
         <p:nvSpPr>
-          <p:cNvPr id="11" name="S07-mark192"/>
-          <p:cNvSpPr/>
-          <p:nvPr/>
-        </p:nvSpPr>
-        <p:spPr>
-          <a:xfrm>
-            <a:off x="6778041" y="4594417"/>
-            <a:ext cx="3264660" cy="0"/>
+          <p:cNvPr id="11" name="S07-mark190"/>
+          <p:cNvSpPr/>
+          <p:nvPr/>
+        </p:nvSpPr>
+        <p:spPr>
+          <a:xfrm>
+            <a:off x="6778041" y="4152420"/>
+            <a:ext cx="2732824" cy="0"/>
           </a:xfrm>
           <a:prstGeom prst="line">
             <a:avLst/>
@@ -12958,14 +12919,14 @@
       </p:sp>
       <p:sp>
         <p:nvSpPr>
-          <p:cNvPr id="12" name="S07-mark193"/>
+          <p:cNvPr id="12" name="S07-mark191"/>
           <p:cNvSpPr/>
           <p:nvPr/>
         </p:nvSpPr>
         <p:spPr>
           <a:xfrm flipV="1">
-            <a:off x="10042701" y="3810899"/>
-            <a:ext cx="1096926" cy="783519"/>
+            <a:off x="9510864" y="3496542"/>
+            <a:ext cx="918229" cy="655878"/>
           </a:xfrm>
           <a:prstGeom prst="line">
             <a:avLst/>
@@ -12981,14 +12942,14 @@
       </p:sp>
       <p:sp>
         <p:nvSpPr>
-          <p:cNvPr id="13" name="S07-mark194"/>
+          <p:cNvPr id="13" name="S07-mark192"/>
           <p:cNvSpPr/>
           <p:nvPr/>
         </p:nvSpPr>
         <p:spPr>
           <a:xfrm flipV="1">
-            <a:off x="11139627" y="1852103"/>
-            <a:ext cx="0" cy="1958796"/>
+            <a:off x="10429093" y="1856848"/>
+            <a:ext cx="0" cy="1639694"/>
           </a:xfrm>
           <a:prstGeom prst="line">
             <a:avLst/>
@@ -13004,13 +12965,13 @@
       </p:sp>
       <p:sp>
         <p:nvSpPr>
-          <p:cNvPr id="14" name="S07-label196"/>
+          <p:cNvPr id="14" name="S07-label194"/>
           <p:cNvSpPr txBox="1"/>
           <p:nvPr/>
         </p:nvSpPr>
         <p:spPr>
           <a:xfrm>
-            <a:off x="8028609" y="4671252"/>
+            <a:off x="7762691" y="4229255"/>
             <a:ext cx="763524" cy="349250"/>
           </a:xfrm>
           <a:prstGeom prst="rect">
@@ -13043,13 +13004,13 @@
       </p:sp>
       <p:sp>
         <p:nvSpPr>
-          <p:cNvPr id="15" name="S07-label198"/>
+          <p:cNvPr id="15" name="S07-label196"/>
           <p:cNvSpPr txBox="1"/>
           <p:nvPr/>
         </p:nvSpPr>
         <p:spPr>
           <a:xfrm>
-            <a:off x="10439354" y="4349966"/>
+            <a:off x="9818169" y="3971789"/>
             <a:ext cx="763524" cy="349250"/>
           </a:xfrm>
           <a:prstGeom prst="rect">
@@ -13082,13 +13043,13 @@
       </p:sp>
       <p:sp>
         <p:nvSpPr>
-          <p:cNvPr id="16" name="S07-label200"/>
+          <p:cNvPr id="16" name="S07-label198"/>
           <p:cNvSpPr txBox="1"/>
           <p:nvPr/>
         </p:nvSpPr>
         <p:spPr>
           <a:xfrm>
-            <a:off x="11143437" y="2656876"/>
+            <a:off x="10432903" y="2502070"/>
             <a:ext cx="763524" cy="349250"/>
           </a:xfrm>
           <a:prstGeom prst="rect">
@@ -13121,7 +13082,7 @@
       </p:sp>
       <p:sp>
         <p:nvSpPr>
-          <p:cNvPr id="17" name="S07-chip201"/>
+          <p:cNvPr id="17" name="S07-chip199"/>
           <p:cNvSpPr txBox="1"/>
           <p:nvPr/>
         </p:nvSpPr>
@@ -13168,7 +13129,7 @@
       </p:sp>
       <p:sp>
         <p:nvSpPr>
-          <p:cNvPr id="18" name="S07-text202"/>
+          <p:cNvPr id="18" name="S07-text200"/>
           <p:cNvSpPr txBox="1"/>
           <p:nvPr/>
         </p:nvSpPr>
@@ -13224,7 +13185,7 @@
       </p:sp>
       <p:sp>
         <p:nvSpPr>
-          <p:cNvPr id="19" name="S07-chip203"/>
+          <p:cNvPr id="19" name="S07-chip201"/>
           <p:cNvSpPr txBox="1"/>
           <p:nvPr/>
         </p:nvSpPr>
@@ -13271,7 +13232,7 @@
       </p:sp>
       <p:sp>
         <p:nvSpPr>
-          <p:cNvPr id="20" name="S07-text204"/>
+          <p:cNvPr id="20" name="S07-text202"/>
           <p:cNvSpPr txBox="1"/>
           <p:nvPr/>
         </p:nvSpPr>
@@ -13310,7 +13271,7 @@
       </p:sp>
       <p:sp>
         <p:nvSpPr>
-          <p:cNvPr id="21" name="S07-chip205"/>
+          <p:cNvPr id="21" name="S07-chip203"/>
           <p:cNvSpPr txBox="1"/>
           <p:nvPr/>
         </p:nvSpPr>
@@ -13357,7 +13318,7 @@
       </p:sp>
       <p:sp>
         <p:nvSpPr>
-          <p:cNvPr id="22" name="S07-text206"/>
+          <p:cNvPr id="22" name="S07-text204"/>
           <p:cNvSpPr txBox="1"/>
           <p:nvPr/>
         </p:nvSpPr>
@@ -13527,7 +13488,7 @@
       </p:sp>
       <p:sp>
         <p:nvSpPr>
-          <p:cNvPr id="3" name="S08-text207"/>
+          <p:cNvPr id="3" name="S08-text205"/>
           <p:cNvSpPr txBox="1"/>
           <p:nvPr/>
         </p:nvSpPr>
@@ -13566,7 +13527,7 @@
       </p:sp>
       <p:sp>
         <p:nvSpPr>
-          <p:cNvPr id="4" name="S08-mark208"/>
+          <p:cNvPr id="4" name="S08-mark206"/>
           <p:cNvSpPr/>
           <p:nvPr/>
         </p:nvSpPr>
@@ -13607,7 +13568,7 @@
       </p:sp>
       <p:sp>
         <p:nvSpPr>
-          <p:cNvPr id="5" name="S08-mark209"/>
+          <p:cNvPr id="5" name="S08-mark207"/>
           <p:cNvSpPr/>
           <p:nvPr/>
         </p:nvSpPr>
@@ -13648,7 +13609,7 @@
       </p:sp>
       <p:sp>
         <p:nvSpPr>
-          <p:cNvPr id="6" name="S08-mark210"/>
+          <p:cNvPr id="6" name="S08-mark208"/>
           <p:cNvSpPr/>
           <p:nvPr/>
         </p:nvSpPr>
@@ -13689,7 +13650,7 @@
       </p:sp>
       <p:sp>
         <p:nvSpPr>
-          <p:cNvPr id="7" name="S08-mark211"/>
+          <p:cNvPr id="7" name="S08-mark209"/>
           <p:cNvSpPr/>
           <p:nvPr/>
         </p:nvSpPr>
@@ -13730,7 +13691,7 @@
       </p:sp>
       <p:sp>
         <p:nvSpPr>
-          <p:cNvPr id="8" name="S08-mark212"/>
+          <p:cNvPr id="8" name="S08-mark210"/>
           <p:cNvSpPr/>
           <p:nvPr/>
         </p:nvSpPr>
@@ -13771,7 +13732,7 @@
       </p:sp>
       <p:sp>
         <p:nvSpPr>
-          <p:cNvPr id="9" name="S08-mark213"/>
+          <p:cNvPr id="9" name="S08-mark211"/>
           <p:cNvSpPr/>
           <p:nvPr/>
         </p:nvSpPr>
@@ -13812,7 +13773,7 @@
       </p:sp>
       <p:sp>
         <p:nvSpPr>
-          <p:cNvPr id="10" name="S08-mark214"/>
+          <p:cNvPr id="10" name="S08-mark212"/>
           <p:cNvSpPr/>
           <p:nvPr/>
         </p:nvSpPr>
@@ -13835,7 +13796,7 @@
       </p:sp>
       <p:sp>
         <p:nvSpPr>
-          <p:cNvPr id="11" name="S08-mark215"/>
+          <p:cNvPr id="11" name="S08-mark213"/>
           <p:cNvSpPr/>
           <p:nvPr/>
         </p:nvSpPr>
@@ -13858,7 +13819,7 @@
       </p:sp>
       <p:sp>
         <p:nvSpPr>
-          <p:cNvPr id="12" name="S08-mark216"/>
+          <p:cNvPr id="12" name="S08-mark214"/>
           <p:cNvSpPr/>
           <p:nvPr/>
         </p:nvSpPr>
@@ -13881,7 +13842,7 @@
       </p:sp>
       <p:sp>
         <p:nvSpPr>
-          <p:cNvPr id="13" name="S08-mark217"/>
+          <p:cNvPr id="13" name="S08-mark215"/>
           <p:cNvSpPr/>
           <p:nvPr/>
         </p:nvSpPr>
@@ -13904,7 +13865,7 @@
       </p:sp>
       <p:sp>
         <p:nvSpPr>
-          <p:cNvPr id="14" name="S08-mark218"/>
+          <p:cNvPr id="14" name="S08-mark216"/>
           <p:cNvSpPr/>
           <p:nvPr/>
         </p:nvSpPr>
@@ -13927,7 +13888,7 @@
       </p:sp>
       <p:sp>
         <p:nvSpPr>
-          <p:cNvPr id="15" name="S08-mark219"/>
+          <p:cNvPr id="15" name="S08-mark217"/>
           <p:cNvSpPr/>
           <p:nvPr/>
         </p:nvSpPr>
@@ -13950,7 +13911,7 @@
       </p:sp>
       <p:sp>
         <p:nvSpPr>
-          <p:cNvPr id="16" name="S08-mark220"/>
+          <p:cNvPr id="16" name="S08-mark218"/>
           <p:cNvSpPr/>
           <p:nvPr/>
         </p:nvSpPr>
@@ -13973,7 +13934,7 @@
       </p:sp>
       <p:sp>
         <p:nvSpPr>
-          <p:cNvPr id="17" name="S08-mark221"/>
+          <p:cNvPr id="17" name="S08-mark219"/>
           <p:cNvSpPr/>
           <p:nvPr/>
         </p:nvSpPr>
@@ -13996,7 +13957,7 @@
       </p:sp>
       <p:sp>
         <p:nvSpPr>
-          <p:cNvPr id="18" name="S08-mark222"/>
+          <p:cNvPr id="18" name="S08-mark220"/>
           <p:cNvSpPr/>
           <p:nvPr/>
         </p:nvSpPr>
@@ -14019,7 +13980,7 @@
       </p:sp>
       <p:sp>
         <p:nvSpPr>
-          <p:cNvPr id="19" name="S08-mark223"/>
+          <p:cNvPr id="19" name="S08-mark221"/>
           <p:cNvSpPr/>
           <p:nvPr/>
         </p:nvSpPr>
@@ -14042,7 +14003,7 @@
       </p:sp>
       <p:sp>
         <p:nvSpPr>
-          <p:cNvPr id="20" name="S08-mark224"/>
+          <p:cNvPr id="20" name="S08-mark222"/>
           <p:cNvSpPr/>
           <p:nvPr/>
         </p:nvSpPr>
@@ -14065,7 +14026,7 @@
       </p:sp>
       <p:sp>
         <p:nvSpPr>
-          <p:cNvPr id="21" name="S08-mark225"/>
+          <p:cNvPr id="21" name="S08-mark223"/>
           <p:cNvSpPr/>
           <p:nvPr/>
         </p:nvSpPr>
@@ -14088,7 +14049,7 @@
       </p:sp>
       <p:sp>
         <p:nvSpPr>
-          <p:cNvPr id="22" name="S08-mark226"/>
+          <p:cNvPr id="22" name="S08-mark224"/>
           <p:cNvSpPr/>
           <p:nvPr/>
         </p:nvSpPr>
@@ -14111,7 +14072,7 @@
       </p:sp>
       <p:sp>
         <p:nvSpPr>
-          <p:cNvPr id="23" name="S08-mark227"/>
+          <p:cNvPr id="23" name="S08-mark225"/>
           <p:cNvSpPr/>
           <p:nvPr/>
         </p:nvSpPr>
@@ -14134,7 +14095,7 @@
       </p:sp>
       <p:sp>
         <p:nvSpPr>
-          <p:cNvPr id="24" name="S08-mark228"/>
+          <p:cNvPr id="24" name="S08-mark226"/>
           <p:cNvSpPr/>
           <p:nvPr/>
         </p:nvSpPr>
@@ -14157,7 +14118,7 @@
       </p:sp>
       <p:sp>
         <p:nvSpPr>
-          <p:cNvPr id="25" name="S08-mark229"/>
+          <p:cNvPr id="25" name="S08-mark227"/>
           <p:cNvSpPr/>
           <p:nvPr/>
         </p:nvSpPr>
@@ -14180,7 +14141,7 @@
       </p:sp>
       <p:sp>
         <p:nvSpPr>
-          <p:cNvPr id="26" name="S08-mark230"/>
+          <p:cNvPr id="26" name="S08-mark228"/>
           <p:cNvSpPr/>
           <p:nvPr/>
         </p:nvSpPr>
@@ -14203,7 +14164,7 @@
       </p:sp>
       <p:sp>
         <p:nvSpPr>
-          <p:cNvPr id="27" name="S08-mark231"/>
+          <p:cNvPr id="27" name="S08-mark229"/>
           <p:cNvSpPr/>
           <p:nvPr/>
         </p:nvSpPr>
@@ -14226,7 +14187,7 @@
       </p:sp>
       <p:sp>
         <p:nvSpPr>
-          <p:cNvPr id="28" name="S08-mark232"/>
+          <p:cNvPr id="28" name="S08-mark230"/>
           <p:cNvSpPr/>
           <p:nvPr/>
         </p:nvSpPr>
@@ -14249,7 +14210,7 @@
       </p:sp>
       <p:sp>
         <p:nvSpPr>
-          <p:cNvPr id="29" name="S08-mark233"/>
+          <p:cNvPr id="29" name="S08-mark231"/>
           <p:cNvSpPr/>
           <p:nvPr/>
         </p:nvSpPr>
@@ -14272,7 +14233,7 @@
       </p:sp>
       <p:sp>
         <p:nvSpPr>
-          <p:cNvPr id="30" name="S08-mark234"/>
+          <p:cNvPr id="30" name="S08-mark232"/>
           <p:cNvSpPr/>
           <p:nvPr/>
         </p:nvSpPr>
@@ -14295,7 +14256,7 @@
       </p:sp>
       <p:sp>
         <p:nvSpPr>
-          <p:cNvPr id="31" name="S08-mark235"/>
+          <p:cNvPr id="31" name="S08-mark233"/>
           <p:cNvSpPr/>
           <p:nvPr/>
         </p:nvSpPr>
@@ -14318,7 +14279,7 @@
       </p:sp>
       <p:sp>
         <p:nvSpPr>
-          <p:cNvPr id="32" name="S08-mark236"/>
+          <p:cNvPr id="32" name="S08-mark234"/>
           <p:cNvSpPr/>
           <p:nvPr/>
         </p:nvSpPr>
@@ -14341,7 +14302,7 @@
       </p:sp>
       <p:sp>
         <p:nvSpPr>
-          <p:cNvPr id="33" name="S08-mark237"/>
+          <p:cNvPr id="33" name="S08-mark235"/>
           <p:cNvSpPr/>
           <p:nvPr/>
         </p:nvSpPr>
@@ -14364,7 +14325,7 @@
       </p:sp>
       <p:sp>
         <p:nvSpPr>
-          <p:cNvPr id="34" name="S08-mark238"/>
+          <p:cNvPr id="34" name="S08-mark236"/>
           <p:cNvSpPr/>
           <p:nvPr/>
         </p:nvSpPr>
@@ -14387,7 +14348,7 @@
       </p:sp>
       <p:sp>
         <p:nvSpPr>
-          <p:cNvPr id="35" name="S08-mark239"/>
+          <p:cNvPr id="35" name="S08-mark237"/>
           <p:cNvSpPr/>
           <p:nvPr/>
         </p:nvSpPr>
@@ -14410,7 +14371,7 @@
       </p:sp>
       <p:sp>
         <p:nvSpPr>
-          <p:cNvPr id="36" name="S08-mark240"/>
+          <p:cNvPr id="36" name="S08-mark238"/>
           <p:cNvSpPr/>
           <p:nvPr/>
         </p:nvSpPr>
@@ -14433,7 +14394,7 @@
       </p:sp>
       <p:sp>
         <p:nvSpPr>
-          <p:cNvPr id="37" name="S08-figure241" descr="한 모서리가 3 cm인 정육면체의 전개도(모눈 위): 넓이 9 cm²인 정사각형 6개"/>
+          <p:cNvPr id="37" name="S08-figure239" descr="한 모서리가 3 cm인 정육면체의 전개도(모눈 위): 넓이 9 cm²인 정사각형 6개"/>
           <p:cNvSpPr/>
           <p:nvPr/>
         </p:nvSpPr>
@@ -14477,7 +14438,7 @@
       </p:sp>
       <p:sp>
         <p:nvSpPr>
-          <p:cNvPr id="38" name="S08-mark242"/>
+          <p:cNvPr id="38" name="S08-mark240"/>
           <p:cNvSpPr/>
           <p:nvPr/>
         </p:nvSpPr>
@@ -14521,7 +14482,7 @@
       </p:sp>
       <p:sp>
         <p:nvSpPr>
-          <p:cNvPr id="39" name="S08-mark243"/>
+          <p:cNvPr id="39" name="S08-mark241"/>
           <p:cNvSpPr/>
           <p:nvPr/>
         </p:nvSpPr>
@@ -14565,7 +14526,7 @@
       </p:sp>
       <p:sp>
         <p:nvSpPr>
-          <p:cNvPr id="40" name="S08-mark244"/>
+          <p:cNvPr id="40" name="S08-mark242"/>
           <p:cNvSpPr/>
           <p:nvPr/>
         </p:nvSpPr>
@@ -14609,7 +14570,7 @@
       </p:sp>
       <p:sp>
         <p:nvSpPr>
-          <p:cNvPr id="41" name="S08-mark245"/>
+          <p:cNvPr id="41" name="S08-mark243"/>
           <p:cNvSpPr/>
           <p:nvPr/>
         </p:nvSpPr>
@@ -14653,7 +14614,7 @@
       </p:sp>
       <p:sp>
         <p:nvSpPr>
-          <p:cNvPr id="42" name="S08-mark246"/>
+          <p:cNvPr id="42" name="S08-mark244"/>
           <p:cNvSpPr/>
           <p:nvPr/>
         </p:nvSpPr>
@@ -14697,7 +14658,7 @@
       </p:sp>
       <p:sp>
         <p:nvSpPr>
-          <p:cNvPr id="43" name="S08-label248"/>
+          <p:cNvPr id="43" name="S08-label246"/>
           <p:cNvSpPr txBox="1"/>
           <p:nvPr/>
         </p:nvSpPr>
@@ -14736,7 +14697,7 @@
       </p:sp>
       <p:sp>
         <p:nvSpPr>
-          <p:cNvPr id="44" name="S08-label250"/>
+          <p:cNvPr id="44" name="S08-label248"/>
           <p:cNvSpPr txBox="1"/>
           <p:nvPr/>
         </p:nvSpPr>
@@ -14775,7 +14736,7 @@
       </p:sp>
       <p:sp>
         <p:nvSpPr>
-          <p:cNvPr id="45" name="S08-label252"/>
+          <p:cNvPr id="45" name="S08-label250"/>
           <p:cNvSpPr txBox="1"/>
           <p:nvPr/>
         </p:nvSpPr>
@@ -14814,7 +14775,7 @@
       </p:sp>
       <p:sp>
         <p:nvSpPr>
-          <p:cNvPr id="46" name="S08-label254"/>
+          <p:cNvPr id="46" name="S08-label252"/>
           <p:cNvSpPr txBox="1"/>
           <p:nvPr/>
         </p:nvSpPr>
@@ -14853,7 +14814,7 @@
       </p:sp>
       <p:sp>
         <p:nvSpPr>
-          <p:cNvPr id="47" name="S08-label256"/>
+          <p:cNvPr id="47" name="S08-label254"/>
           <p:cNvSpPr txBox="1"/>
           <p:nvPr/>
         </p:nvSpPr>
@@ -14892,7 +14853,7 @@
       </p:sp>
       <p:sp>
         <p:nvSpPr>
-          <p:cNvPr id="48" name="S08-label258"/>
+          <p:cNvPr id="48" name="S08-label256"/>
           <p:cNvSpPr txBox="1"/>
           <p:nvPr/>
         </p:nvSpPr>
@@ -14931,7 +14892,7 @@
       </p:sp>
       <p:sp>
         <p:nvSpPr>
-          <p:cNvPr id="49" name="S08-card259"/>
+          <p:cNvPr id="49" name="S08-card257"/>
           <p:cNvSpPr/>
           <p:nvPr/>
         </p:nvSpPr>
@@ -14958,7 +14919,7 @@
       </p:sp>
       <p:sp>
         <p:nvSpPr>
-          <p:cNvPr id="50" name="S08-cardtext260"/>
+          <p:cNvPr id="50" name="S08-cardtext258"/>
           <p:cNvSpPr txBox="1"/>
           <p:nvPr/>
         </p:nvSpPr>
@@ -15020,7 +14981,7 @@
       </p:sp>
       <p:sp>
         <p:nvSpPr>
-          <p:cNvPr id="51" name="S08-card261"/>
+          <p:cNvPr id="51" name="S08-card259"/>
           <p:cNvSpPr/>
           <p:nvPr/>
         </p:nvSpPr>
@@ -15047,7 +15008,7 @@
       </p:sp>
       <p:sp>
         <p:nvSpPr>
-          <p:cNvPr id="52" name="S08-cardtext262"/>
+          <p:cNvPr id="52" name="S08-cardtext260"/>
           <p:cNvSpPr txBox="1"/>
           <p:nvPr/>
         </p:nvSpPr>
@@ -15203,7 +15164,7 @@
       </p:sp>
       <p:sp>
         <p:nvSpPr>
-          <p:cNvPr id="3" name="S09-text263"/>
+          <p:cNvPr id="3" name="S09-text261"/>
           <p:cNvSpPr txBox="1"/>
           <p:nvPr/>
         </p:nvSpPr>
@@ -15242,7 +15203,7 @@
       </p:sp>
       <p:sp>
         <p:nvSpPr>
-          <p:cNvPr id="4" name="S09-card264"/>
+          <p:cNvPr id="4" name="S09-card262"/>
           <p:cNvSpPr/>
           <p:nvPr/>
         </p:nvSpPr>
@@ -15269,7 +15230,7 @@
       </p:sp>
       <p:sp>
         <p:nvSpPr>
-          <p:cNvPr id="5" name="S09-cardtext265"/>
+          <p:cNvPr id="5" name="S09-cardtext263"/>
           <p:cNvSpPr txBox="1"/>
           <p:nvPr/>
         </p:nvSpPr>
@@ -15311,7 +15272,7 @@
       </p:sp>
       <p:sp>
         <p:nvSpPr>
-          <p:cNvPr id="6" name="S09-chip266"/>
+          <p:cNvPr id="6" name="S09-chip264"/>
           <p:cNvSpPr txBox="1"/>
           <p:nvPr/>
         </p:nvSpPr>
@@ -15358,7 +15319,7 @@
       </p:sp>
       <p:sp>
         <p:nvSpPr>
-          <p:cNvPr id="7" name="S09-text267"/>
+          <p:cNvPr id="7" name="S09-text265"/>
           <p:cNvSpPr txBox="1"/>
           <p:nvPr/>
         </p:nvSpPr>
@@ -15414,7 +15375,7 @@
       </p:sp>
       <p:sp>
         <p:nvSpPr>
-          <p:cNvPr id="8" name="S09-chip268"/>
+          <p:cNvPr id="8" name="S09-chip266"/>
           <p:cNvSpPr txBox="1"/>
           <p:nvPr/>
         </p:nvSpPr>
@@ -15461,7 +15422,7 @@
       </p:sp>
       <p:sp>
         <p:nvSpPr>
-          <p:cNvPr id="9" name="S09-text269"/>
+          <p:cNvPr id="9" name="S09-text267"/>
           <p:cNvSpPr txBox="1"/>
           <p:nvPr/>
         </p:nvSpPr>
@@ -15517,7 +15478,7 @@
       </p:sp>
       <p:sp>
         <p:nvSpPr>
-          <p:cNvPr id="10" name="S09-chip270"/>
+          <p:cNvPr id="10" name="S09-chip268"/>
           <p:cNvSpPr txBox="1"/>
           <p:nvPr/>
         </p:nvSpPr>
@@ -15564,7 +15525,7 @@
       </p:sp>
       <p:sp>
         <p:nvSpPr>
-          <p:cNvPr id="11" name="S09-text271"/>
+          <p:cNvPr id="11" name="S09-text269"/>
           <p:cNvSpPr txBox="1"/>
           <p:nvPr/>
         </p:nvSpPr>

--- a/dist/초6/수학/입체와측정/초6_수학_입체와측정_04_직육면체의겉넓이_학생용.pptx
+++ b/dist/초6/수학/입체와측정/초6_수학_입체와측정_04_직육면체의겉넓이_학생용.pptx
@@ -119,13 +119,13 @@
   <p:extLst>
     <p:ext uri="{521415D9-36F7-43E2-AB2F-B90AF26B5E84}">
       <p14:sectionLst xmlns:p14="http://schemas.microsoft.com/office/powerpoint/2010/main">
-        <p14:section name="도입" id="{91040a69-6e41-9040-6fd3-163f0878c4e7}">
+        <p14:section name="도입" id="{1623bcf6-3f35-51b1-5a71-014d6001e255}">
           <p14:sldIdLst>
             <p14:sldId id="256"/>
             <p14:sldId id="257"/>
           </p14:sldIdLst>
         </p14:section>
-        <p14:section name="개념" id="{db30fa23-d8ce-5844-123e-81e9925de083}">
+        <p14:section name="개념" id="{83344b59-b53e-39bc-cda7-76a3a5781f00}">
           <p14:sldIdLst>
             <p14:sldId id="258"/>
             <p14:sldId id="259"/>
@@ -133,31 +133,31 @@
             <p14:sldId id="263"/>
           </p14:sldIdLst>
         </p14:section>
-        <p14:section name="연습" id="{fcc9a6f2-726a-5359-2d40-5f22020b7256}">
+        <p14:section name="연습" id="{72ea7adf-4028-e983-7066-1f3a0e80376f}">
           <p14:sldIdLst>
             <p14:sldId id="261"/>
             <p14:sldId id="262"/>
             <p14:sldId id="264"/>
           </p14:sldIdLst>
         </p14:section>
-        <p14:section name="개념" id="{2275522b-bdbf-2472-aa63-ef1d3f59a6f7}">
+        <p14:section name="개념" id="{9b80f3a0-8d4a-d6fa-b75c-f62dfd4e4a9d}">
           <p14:sldIdLst/>
         </p14:section>
-        <p14:section name="연습" id="{9fe5533b-2c74-12e5-38b5-7172a0e41491}">
+        <p14:section name="연습" id="{d55851b5-4781-9ce2-441d-b61b318f0fe8}">
           <p14:sldIdLst/>
         </p14:section>
-        <p14:section name="확인" id="{4dbe110a-132e-2a11-7097-309e4edc1020}">
+        <p14:section name="확인" id="{dd708e75-0e67-b850-dff5-8816f550c2a1}">
           <p14:sldIdLst>
             <p14:sldId id="265"/>
             <p14:sldId id="266"/>
           </p14:sldIdLst>
         </p14:section>
-        <p14:section name="정리" id="{62d0ae22-a67e-3eb7-5fb8-cb080b242470}">
+        <p14:section name="정리" id="{99816ee7-3216-a1cd-b61f-acdd34d63659}">
           <p14:sldIdLst>
             <p14:sldId id="267"/>
           </p14:sldIdLst>
         </p14:section>
-        <p14:section name="보충" id="{7dddb8e2-bba0-8e65-d4d1-a47038a97134}">
+        <p14:section name="보충" id="{0154ee79-41cc-ba7b-2a34-97af247698a1}">
           <p14:sldIdLst>
             <p14:sldId id="268"/>
           </p14:sldIdLst>
